--- a/大三上/软件设计模式/重制版PPT/03 设计模式概述（重制版）.pptx
+++ b/大三上/软件设计模式/重制版PPT/03 设计模式概述（重制版）.pptx
@@ -1463,9 +1463,9 @@
         <p:grpSpPr>
           <a:xfrm>
             <a:off x="526161" y="1977866"/>
-            <a:ext cx="5417439" cy="3150490"/>
+            <a:ext cx="5417439" cy="2882837"/>
             <a:chOff x="526161" y="1977866"/>
-            <a:chExt cx="5417439" cy="3150490"/>
+            <a:chExt cx="5417439" cy="2882837"/>
           </a:xfrm>
         </p:grpSpPr>
         <p:sp>
@@ -1477,47 +1477,7 @@
           <p:spPr>
             <a:xfrm>
               <a:off x="526161" y="1977866"/>
-              <a:ext cx="2161116" cy="278702"/>
-            </a:xfrm>
-            <a:prstGeom prst="rect">
-              <a:avLst/>
-            </a:prstGeom>
-            <a:noFill/>
-            <a:ln>
-              <a:noFill/>
-            </a:ln>
-          </p:spPr>
-          <p:txBody>
-            <a:bodyPr wrap="none" lIns="0" tIns="0" rIns="0" bIns="0" anchor="t" anchorCtr="0">
-              <a:spAutoFit/>
-            </a:bodyPr>
-            <a:lstStyle/>
-            <a:p>
-              <a:pPr algn="l"/>
-              <a:r>
-                <a:rPr lang="zh-CN" sz="1420" b="1" dirty="0">
-                  <a:solidFill>
-                    <a:srgbClr val="5B3FA0"/>
-                  </a:solidFill>
-                  <a:latin typeface="+mn-lt"/>
-                  <a:ea typeface="+mn-ea"/>
-                  <a:cs typeface="+mn-cs"/>
-                </a:rPr>
-                <a:t>模式名称 Pattern name</a:t>
-              </a:r>
-            </a:p>
-          </p:txBody>
-        </p:sp>
-        <p:sp>
-          <p:nvSpPr>
-            <p:cNvPr id="10" name="TextBox 10"/>
-            <p:cNvSpPr txBox="1"/>
-            <p:nvPr/>
-          </p:nvSpPr>
-          <p:spPr>
-            <a:xfrm>
-              <a:off x="2875978" y="1977866"/>
-              <a:ext cx="2899918" cy="814007"/>
+              <a:ext cx="1521670" cy="546354"/>
             </a:xfrm>
             <a:prstGeom prst="rect">
               <a:avLst/>
@@ -1539,93 +1499,19 @@
                 </a:lnSpc>
               </a:pPr>
               <a:r>
-                <a:rPr lang="zh-CN" sz="1420" dirty="0">
-                  <a:solidFill>
-                    <a:srgbClr val="1F2937"/>
-                  </a:solidFill>
-                  <a:latin typeface="+mn-lt"/>
-                  <a:ea typeface="+mn-ea"/>
-                  <a:cs typeface="+mn-cs"/>
-                </a:rPr>
-                <a:t>用一两个词描述问题、解法和效果，</a:t>
+                <a:rPr lang="zh-CN" sz="1420" b="1" dirty="0">
+                  <a:solidFill>
+                    <a:srgbClr val="5B3FA0"/>
+                  </a:solidFill>
+                  <a:latin typeface="+mn-lt"/>
+                  <a:ea typeface="+mn-ea"/>
+                  <a:cs typeface="+mn-cs"/>
+                </a:rPr>
+                <a:t>模式名称 Pattern</a:t>
               </a:r>
               <a:br/>
               <a:r>
-                <a:rPr lang="zh-CN" sz="1420" dirty="0">
-                  <a:solidFill>
-                    <a:srgbClr val="1F2937"/>
-                  </a:solidFill>
-                  <a:latin typeface="+mn-lt"/>
-                  <a:ea typeface="+mn-ea"/>
-                  <a:cs typeface="+mn-cs"/>
-                </a:rPr>
-                <a:t>让设计词汇上升到更高的抽象层次，</a:t>
-              </a:r>
-              <a:br/>
-              <a:r>
-                <a:rPr lang="zh-CN" sz="1420" dirty="0">
-                  <a:solidFill>
-                    <a:srgbClr val="1F2937"/>
-                  </a:solidFill>
-                  <a:latin typeface="+mn-lt"/>
-                  <a:ea typeface="+mn-ea"/>
-                  <a:cs typeface="+mn-cs"/>
-                </a:rPr>
-                <a:t>方便交流</a:t>
-              </a:r>
-            </a:p>
-          </p:txBody>
-        </p:sp>
-        <p:sp>
-          <p:nvSpPr>
-            <p:cNvPr id="11" name="Rectangle 11"/>
-            <p:cNvSpPr/>
-            <p:nvPr/>
-          </p:nvSpPr>
-          <p:spPr>
-            <a:xfrm>
-              <a:off x="533400" y="2819400"/>
-              <a:ext cx="5410200" cy="9525"/>
-            </a:xfrm>
-            <a:prstGeom prst="rect">
-              <a:avLst/>
-            </a:prstGeom>
-            <a:solidFill>
-              <a:srgbClr val="D9DFEA"/>
-            </a:solidFill>
-            <a:ln>
-              <a:noFill/>
-            </a:ln>
-          </p:spPr>
-        </p:sp>
-        <p:sp>
-          <p:nvSpPr>
-            <p:cNvPr id="12" name="TextBox 12"/>
-            <p:cNvSpPr txBox="1"/>
-            <p:nvPr/>
-          </p:nvSpPr>
-          <p:spPr>
-            <a:xfrm>
-              <a:off x="526161" y="2935129"/>
-              <a:ext cx="1226399" cy="278702"/>
-            </a:xfrm>
-            <a:prstGeom prst="rect">
-              <a:avLst/>
-            </a:prstGeom>
-            <a:noFill/>
-            <a:ln>
-              <a:noFill/>
-            </a:ln>
-          </p:spPr>
-          <p:txBody>
-            <a:bodyPr wrap="none" lIns="0" tIns="0" rIns="0" bIns="0" anchor="t" anchorCtr="0">
-              <a:spAutoFit/>
-            </a:bodyPr>
-            <a:lstStyle/>
-            <a:p>
-              <a:pPr algn="l"/>
-              <a:r>
-                <a:rPr lang="zh-CN" sz="1420" b="1" dirty="0">
+                <a:rPr lang="en-US" sz="1420" b="1" dirty="0">
                   <a:solidFill>
                     <a:srgbClr val="5B3FA0"/>
                   </a:solidFill>
@@ -1633,21 +1519,21 @@
                   <a:ea typeface="+mn-ea"/>
                   <a:cs typeface="+mn-cs"/>
                 </a:rPr>
-                <a:t>问题 Problem</a:t>
-              </a:r>
-            </a:p>
-          </p:txBody>
-        </p:sp>
-        <p:sp>
-          <p:nvSpPr>
-            <p:cNvPr id="13" name="TextBox 13"/>
-            <p:cNvSpPr txBox="1"/>
-            <p:nvPr/>
-          </p:nvSpPr>
-          <p:spPr>
-            <a:xfrm>
-              <a:off x="2875978" y="2935129"/>
-              <a:ext cx="2899918" cy="546354"/>
+                <a:t>name</a:t>
+              </a:r>
+            </a:p>
+          </p:txBody>
+        </p:sp>
+        <p:sp>
+          <p:nvSpPr>
+            <p:cNvPr id="10" name="TextBox 10"/>
+            <p:cNvSpPr txBox="1"/>
+            <p:nvPr/>
+          </p:nvSpPr>
+          <p:spPr>
+            <a:xfrm>
+              <a:off x="2474024" y="1977866"/>
+              <a:ext cx="3260598" cy="546354"/>
             </a:xfrm>
             <a:prstGeom prst="rect">
               <a:avLst/>
@@ -1677,7 +1563,7 @@
                   <a:ea typeface="+mn-ea"/>
                   <a:cs typeface="+mn-cs"/>
                 </a:rPr>
-                <a:t>描述应该在什么时候使用模式，解释</a:t>
+                <a:t>用一两个词描述问题、解法和效果，让设</a:t>
               </a:r>
               <a:br/>
               <a:r>
@@ -1689,20 +1575,20 @@
                   <a:ea typeface="+mn-ea"/>
                   <a:cs typeface="+mn-cs"/>
                 </a:rPr>
-                <a:t>设计问题和问题存在的前因后果</a:t>
-              </a:r>
-            </a:p>
-          </p:txBody>
-        </p:sp>
-        <p:sp>
-          <p:nvSpPr>
-            <p:cNvPr id="14" name="Rectangle 14"/>
+                <a:t>计词汇上升到更高的抽象层次，方便交流</a:t>
+              </a:r>
+            </a:p>
+          </p:txBody>
+        </p:sp>
+        <p:sp>
+          <p:nvSpPr>
+            <p:cNvPr id="11" name="Rectangle 11"/>
             <p:cNvSpPr/>
             <p:nvPr/>
           </p:nvSpPr>
           <p:spPr>
             <a:xfrm>
-              <a:off x="533400" y="3509010"/>
+              <a:off x="533400" y="2551748"/>
               <a:ext cx="5410200" cy="9525"/>
             </a:xfrm>
             <a:prstGeom prst="rect">
@@ -1718,14 +1604,14 @@
         </p:sp>
         <p:sp>
           <p:nvSpPr>
-            <p:cNvPr id="15" name="TextBox 15"/>
-            <p:cNvSpPr txBox="1"/>
-            <p:nvPr/>
-          </p:nvSpPr>
-          <p:spPr>
-            <a:xfrm>
-              <a:off x="526161" y="3624739"/>
-              <a:ext cx="1628102" cy="278702"/>
+            <p:cNvPr id="12" name="TextBox 12"/>
+            <p:cNvSpPr txBox="1"/>
+            <p:nvPr/>
+          </p:nvSpPr>
+          <p:spPr>
+            <a:xfrm>
+              <a:off x="526161" y="2667476"/>
+              <a:ext cx="1226399" cy="278702"/>
             </a:xfrm>
             <a:prstGeom prst="rect">
               <a:avLst/>
@@ -1751,21 +1637,21 @@
                   <a:ea typeface="+mn-ea"/>
                   <a:cs typeface="+mn-cs"/>
                 </a:rPr>
-                <a:t>解决方案 Solution</a:t>
-              </a:r>
-            </a:p>
-          </p:txBody>
-        </p:sp>
-        <p:sp>
-          <p:nvSpPr>
-            <p:cNvPr id="16" name="TextBox 16"/>
-            <p:cNvSpPr txBox="1"/>
-            <p:nvPr/>
-          </p:nvSpPr>
-          <p:spPr>
-            <a:xfrm>
-              <a:off x="2875978" y="3624739"/>
-              <a:ext cx="2899918" cy="546354"/>
+                <a:t>问题 Problem</a:t>
+              </a:r>
+            </a:p>
+          </p:txBody>
+        </p:sp>
+        <p:sp>
+          <p:nvSpPr>
+            <p:cNvPr id="13" name="TextBox 13"/>
+            <p:cNvSpPr txBox="1"/>
+            <p:nvPr/>
+          </p:nvSpPr>
+          <p:spPr>
+            <a:xfrm>
+              <a:off x="2474024" y="2667476"/>
+              <a:ext cx="3260598" cy="546354"/>
             </a:xfrm>
             <a:prstGeom prst="rect">
               <a:avLst/>
@@ -1795,7 +1681,7 @@
                   <a:ea typeface="+mn-ea"/>
                   <a:cs typeface="+mn-cs"/>
                 </a:rPr>
-                <a:t>描述设计的组成成分、它们之间的相</a:t>
+                <a:t>描述应该在什么时候使用模式，解释设计</a:t>
               </a:r>
               <a:br/>
               <a:r>
@@ -1807,20 +1693,20 @@
                   <a:ea typeface="+mn-ea"/>
                   <a:cs typeface="+mn-cs"/>
                 </a:rPr>
-                <a:t>互关系及各自的职责和协作方式</a:t>
-              </a:r>
-            </a:p>
-          </p:txBody>
-        </p:sp>
-        <p:sp>
-          <p:nvSpPr>
-            <p:cNvPr id="17" name="Rectangle 17"/>
+                <a:t>问题和问题存在的前因后果</a:t>
+              </a:r>
+            </a:p>
+          </p:txBody>
+        </p:sp>
+        <p:sp>
+          <p:nvSpPr>
+            <p:cNvPr id="14" name="Rectangle 14"/>
             <p:cNvSpPr/>
             <p:nvPr/>
           </p:nvSpPr>
           <p:spPr>
             <a:xfrm>
-              <a:off x="533400" y="4198620"/>
+              <a:off x="533400" y="3241358"/>
               <a:ext cx="5410200" cy="9525"/>
             </a:xfrm>
             <a:prstGeom prst="rect">
@@ -1836,14 +1722,14 @@
         </p:sp>
         <p:sp>
           <p:nvSpPr>
-            <p:cNvPr id="18" name="TextBox 18"/>
-            <p:cNvSpPr txBox="1"/>
-            <p:nvPr/>
-          </p:nvSpPr>
-          <p:spPr>
-            <a:xfrm>
-              <a:off x="526161" y="4314349"/>
-              <a:ext cx="1788289" cy="278702"/>
+            <p:cNvPr id="15" name="TextBox 15"/>
+            <p:cNvSpPr txBox="1"/>
+            <p:nvPr/>
+          </p:nvSpPr>
+          <p:spPr>
+            <a:xfrm>
+              <a:off x="526161" y="3357086"/>
+              <a:ext cx="1628102" cy="278702"/>
             </a:xfrm>
             <a:prstGeom prst="rect">
               <a:avLst/>
@@ -1869,21 +1755,21 @@
                   <a:ea typeface="+mn-ea"/>
                   <a:cs typeface="+mn-cs"/>
                 </a:rPr>
-                <a:t>效果 Consequences</a:t>
-              </a:r>
-            </a:p>
-          </p:txBody>
-        </p:sp>
-        <p:sp>
-          <p:nvSpPr>
-            <p:cNvPr id="19" name="TextBox 19"/>
-            <p:cNvSpPr txBox="1"/>
-            <p:nvPr/>
-          </p:nvSpPr>
-          <p:spPr>
-            <a:xfrm>
-              <a:off x="2875978" y="4314349"/>
-              <a:ext cx="2899918" cy="814007"/>
+                <a:t>解决方案 Solution</a:t>
+              </a:r>
+            </a:p>
+          </p:txBody>
+        </p:sp>
+        <p:sp>
+          <p:nvSpPr>
+            <p:cNvPr id="16" name="TextBox 16"/>
+            <p:cNvSpPr txBox="1"/>
+            <p:nvPr/>
+          </p:nvSpPr>
+          <p:spPr>
+            <a:xfrm>
+              <a:off x="2474024" y="3357086"/>
+              <a:ext cx="3260598" cy="546354"/>
             </a:xfrm>
             <a:prstGeom prst="rect">
               <a:avLst/>
@@ -1913,7 +1799,7 @@
                   <a:ea typeface="+mn-ea"/>
                   <a:cs typeface="+mn-cs"/>
                 </a:rPr>
-                <a:t>描述模式的应用效果及使用模式应权</a:t>
+                <a:t>描述设计的组成成分、它们之间的相互关</a:t>
               </a:r>
               <a:br/>
               <a:r>
@@ -1925,7 +1811,113 @@
                   <a:ea typeface="+mn-ea"/>
                   <a:cs typeface="+mn-cs"/>
                 </a:rPr>
-                <a:t>衡的问题，主要是对时间和空间、系</a:t>
+                <a:t>系及各自的职责和协作方式</a:t>
+              </a:r>
+            </a:p>
+          </p:txBody>
+        </p:sp>
+        <p:sp>
+          <p:nvSpPr>
+            <p:cNvPr id="17" name="Rectangle 17"/>
+            <p:cNvSpPr/>
+            <p:nvPr/>
+          </p:nvSpPr>
+          <p:spPr>
+            <a:xfrm>
+              <a:off x="533400" y="3930968"/>
+              <a:ext cx="5410200" cy="9525"/>
+            </a:xfrm>
+            <a:prstGeom prst="rect">
+              <a:avLst/>
+            </a:prstGeom>
+            <a:solidFill>
+              <a:srgbClr val="D9DFEA"/>
+            </a:solidFill>
+            <a:ln>
+              <a:noFill/>
+            </a:ln>
+          </p:spPr>
+        </p:sp>
+        <p:sp>
+          <p:nvSpPr>
+            <p:cNvPr id="18" name="TextBox 18"/>
+            <p:cNvSpPr txBox="1"/>
+            <p:nvPr/>
+          </p:nvSpPr>
+          <p:spPr>
+            <a:xfrm>
+              <a:off x="526161" y="4046696"/>
+              <a:ext cx="1788289" cy="278702"/>
+            </a:xfrm>
+            <a:prstGeom prst="rect">
+              <a:avLst/>
+            </a:prstGeom>
+            <a:noFill/>
+            <a:ln>
+              <a:noFill/>
+            </a:ln>
+          </p:spPr>
+          <p:txBody>
+            <a:bodyPr wrap="none" lIns="0" tIns="0" rIns="0" bIns="0" anchor="t" anchorCtr="0">
+              <a:spAutoFit/>
+            </a:bodyPr>
+            <a:lstStyle/>
+            <a:p>
+              <a:pPr algn="l"/>
+              <a:r>
+                <a:rPr lang="zh-CN" sz="1420" b="1" dirty="0">
+                  <a:solidFill>
+                    <a:srgbClr val="5B3FA0"/>
+                  </a:solidFill>
+                  <a:latin typeface="+mn-lt"/>
+                  <a:ea typeface="+mn-ea"/>
+                  <a:cs typeface="+mn-cs"/>
+                </a:rPr>
+                <a:t>效果 Consequences</a:t>
+              </a:r>
+            </a:p>
+          </p:txBody>
+        </p:sp>
+        <p:sp>
+          <p:nvSpPr>
+            <p:cNvPr id="19" name="TextBox 19"/>
+            <p:cNvSpPr txBox="1"/>
+            <p:nvPr/>
+          </p:nvSpPr>
+          <p:spPr>
+            <a:xfrm>
+              <a:off x="2474024" y="4046696"/>
+              <a:ext cx="3260598" cy="814007"/>
+            </a:xfrm>
+            <a:prstGeom prst="rect">
+              <a:avLst/>
+            </a:prstGeom>
+            <a:noFill/>
+            <a:ln>
+              <a:noFill/>
+            </a:ln>
+          </p:spPr>
+          <p:txBody>
+            <a:bodyPr wrap="none" lIns="0" tIns="0" rIns="0" bIns="0" anchor="t" anchorCtr="0">
+              <a:spAutoFit/>
+            </a:bodyPr>
+            <a:lstStyle/>
+            <a:p>
+              <a:pPr algn="l">
+                <a:lnSpc>
+                  <a:spcPts val="2108"/>
+                </a:lnSpc>
+              </a:pPr>
+              <a:r>
+                <a:rPr lang="zh-CN" sz="1420" dirty="0">
+                  <a:solidFill>
+                    <a:srgbClr val="1F2937"/>
+                  </a:solidFill>
+                  <a:latin typeface="+mn-lt"/>
+                  <a:ea typeface="+mn-ea"/>
+                  <a:cs typeface="+mn-cs"/>
+                </a:rPr>
+                <a:t>描述模式的应用效果及使用模式应权衡的</a:t>
               </a:r>
               <a:br/>
               <a:r>
@@ -1937,7 +1929,19 @@
                   <a:ea typeface="+mn-ea"/>
                   <a:cs typeface="+mn-cs"/>
                 </a:rPr>
-                <a:t>统灵活性与扩展性的影响</a:t>
+                <a:t>问题，主要是对时间和空间、系统灵活性</a:t>
+              </a:r>
+              <a:br/>
+              <a:r>
+                <a:rPr lang="zh-CN" sz="1420" dirty="0">
+                  <a:solidFill>
+                    <a:srgbClr val="1F2937"/>
+                  </a:solidFill>
+                  <a:latin typeface="+mn-lt"/>
+                  <a:ea typeface="+mn-ea"/>
+                  <a:cs typeface="+mn-cs"/>
+                </a:rPr>
+                <a:t>与扩展性的影响</a:t>
               </a:r>
             </a:p>
           </p:txBody>
@@ -1951,10 +1955,10 @@
         </p:nvGrpSpPr>
         <p:grpSpPr>
           <a:xfrm>
-            <a:off x="533400" y="5257800"/>
-            <a:ext cx="5410200" cy="979170"/>
-            <a:chOff x="533400" y="5257800"/>
-            <a:chExt cx="5410200" cy="979170"/>
+            <a:off x="533400" y="4990148"/>
+            <a:ext cx="5410200" cy="1246822"/>
+            <a:chOff x="533400" y="4990148"/>
+            <a:chExt cx="5410200" cy="1246822"/>
           </a:xfrm>
         </p:grpSpPr>
         <p:sp>
@@ -1965,12 +1969,12 @@
           </p:nvSpPr>
           <p:spPr>
             <a:xfrm>
-              <a:off x="533400" y="5257800"/>
-              <a:ext cx="5410200" cy="979170"/>
+              <a:off x="533400" y="4990148"/>
+              <a:ext cx="5410200" cy="1246822"/>
             </a:xfrm>
             <a:prstGeom prst="roundRect">
               <a:avLst>
-                <a:gd name="adj" fmla="val 11673"/>
+                <a:gd name="adj" fmla="val 9167"/>
               </a:avLst>
             </a:prstGeom>
             <a:solidFill>
@@ -1989,9 +1993,9 @@
           </p:nvGrpSpPr>
           <p:grpSpPr>
             <a:xfrm>
-              <a:off x="726129" y="5643681"/>
+              <a:off x="726129" y="5510331"/>
               <a:ext cx="224134" cy="192560"/>
-              <a:chOff x="726129" y="5643681"/>
+              <a:chOff x="726129" y="5510331"/>
               <a:chExt cx="224134" cy="192560"/>
             </a:xfrm>
           </p:grpSpPr>
@@ -2003,7 +2007,7 @@
             </p:nvSpPr>
             <p:spPr>
               <a:xfrm>
-                <a:off x="838200" y="5714048"/>
+                <a:off x="838200" y="5580698"/>
                 <a:ext cx="9525" cy="44450"/>
               </a:xfrm>
               <a:custGeom>
@@ -2039,7 +2043,7 @@
             </p:nvSpPr>
             <p:spPr>
               <a:xfrm>
-                <a:off x="726129" y="5643681"/>
+                <a:off x="726129" y="5510331"/>
                 <a:ext cx="224134" cy="192560"/>
               </a:xfrm>
               <a:custGeom>
@@ -2111,7 +2115,7 @@
             </p:nvSpPr>
             <p:spPr>
               <a:xfrm>
-                <a:off x="838200" y="5791836"/>
+                <a:off x="838200" y="5658486"/>
                 <a:ext cx="9525" cy="9525"/>
               </a:xfrm>
               <a:custGeom>
@@ -2148,7 +2152,7 @@
           </p:nvSpPr>
           <p:spPr>
             <a:xfrm>
-              <a:off x="1040511" y="5517356"/>
+              <a:off x="1040511" y="5383054"/>
               <a:ext cx="4180332" cy="541592"/>
             </a:xfrm>
             <a:prstGeom prst="rect">
@@ -4988,7 +4992,7 @@
           <p:spPr>
             <a:xfrm>
               <a:off x="533400" y="1954530"/>
-              <a:ext cx="5391150" cy="3629978"/>
+              <a:ext cx="5353050" cy="3629978"/>
             </a:xfrm>
             <a:prstGeom prst="roundRect">
               <a:avLst>
@@ -5467,8 +5471,8 @@
           </p:nvSpPr>
           <p:spPr>
             <a:xfrm>
-              <a:off x="6267450" y="1954530"/>
-              <a:ext cx="5391150" cy="3629978"/>
+              <a:off x="6305550" y="1954530"/>
+              <a:ext cx="5353050" cy="3629978"/>
             </a:xfrm>
             <a:prstGeom prst="roundRect">
               <a:avLst>
@@ -5493,7 +5497,7 @@
           </p:nvSpPr>
           <p:spPr>
             <a:xfrm>
-              <a:off x="6276975" y="2087880"/>
+              <a:off x="6315075" y="2087880"/>
               <a:ext cx="47625" cy="3363278"/>
             </a:xfrm>
             <a:prstGeom prst="roundRect">
@@ -5517,7 +5521,7 @@
           </p:nvSpPr>
           <p:spPr>
             <a:xfrm>
-              <a:off x="6502146" y="2181701"/>
+              <a:off x="6540246" y="2181701"/>
               <a:ext cx="396799" cy="278702"/>
             </a:xfrm>
             <a:prstGeom prst="rect">
@@ -5557,7 +5561,7 @@
           </p:nvSpPr>
           <p:spPr>
             <a:xfrm>
-              <a:off x="6517005" y="2580323"/>
+              <a:off x="6555105" y="2580323"/>
               <a:ext cx="60960" cy="60960"/>
             </a:xfrm>
             <a:prstGeom prst="ellipse">
@@ -5579,7 +5583,7 @@
           </p:nvSpPr>
           <p:spPr>
             <a:xfrm>
-              <a:off x="6673596" y="2520791"/>
+              <a:off x="6711696" y="2520791"/>
               <a:ext cx="4522978" cy="550164"/>
             </a:xfrm>
             <a:prstGeom prst="rect">
@@ -5635,7 +5639,7 @@
           </p:nvSpPr>
           <p:spPr>
             <a:xfrm>
-              <a:off x="6517005" y="3171825"/>
+              <a:off x="6555105" y="3171825"/>
               <a:ext cx="60960" cy="60960"/>
             </a:xfrm>
             <a:prstGeom prst="ellipse">
@@ -5657,7 +5661,7 @@
           </p:nvSpPr>
           <p:spPr>
             <a:xfrm>
-              <a:off x="6673596" y="3112294"/>
+              <a:off x="6711696" y="3112294"/>
               <a:ext cx="4411167" cy="278702"/>
             </a:xfrm>
             <a:prstGeom prst="rect">
@@ -5697,7 +5701,7 @@
           </p:nvSpPr>
           <p:spPr>
             <a:xfrm>
-              <a:off x="6517005" y="3491865"/>
+              <a:off x="6555105" y="3491865"/>
               <a:ext cx="60960" cy="60960"/>
             </a:xfrm>
             <a:prstGeom prst="ellipse">
@@ -5719,7 +5723,7 @@
           </p:nvSpPr>
           <p:spPr>
             <a:xfrm>
-              <a:off x="6673596" y="3432334"/>
+              <a:off x="6711696" y="3432334"/>
               <a:ext cx="4793488" cy="278702"/>
             </a:xfrm>
             <a:prstGeom prst="rect">
@@ -5759,7 +5763,7 @@
           </p:nvSpPr>
           <p:spPr>
             <a:xfrm>
-              <a:off x="6517005" y="3811905"/>
+              <a:off x="6555105" y="3811905"/>
               <a:ext cx="60960" cy="60960"/>
             </a:xfrm>
             <a:prstGeom prst="ellipse">
@@ -5781,7 +5785,7 @@
           </p:nvSpPr>
           <p:spPr>
             <a:xfrm>
-              <a:off x="6673596" y="3752374"/>
+              <a:off x="6711696" y="3752374"/>
               <a:ext cx="4411167" cy="278702"/>
             </a:xfrm>
             <a:prstGeom prst="rect">
@@ -5843,7 +5847,7 @@
           </p:nvSpPr>
           <p:spPr>
             <a:xfrm>
-              <a:off x="6004415" y="3703320"/>
+              <a:off x="6004415" y="3704273"/>
               <a:ext cx="183170" cy="205359"/>
             </a:xfrm>
             <a:prstGeom prst="rect">
@@ -5885,9 +5889,9 @@
         <p:grpSpPr>
           <a:xfrm>
             <a:off x="533400" y="5769292"/>
-            <a:ext cx="11125200" cy="518160"/>
+            <a:ext cx="11125200" cy="593408"/>
             <a:chOff x="533400" y="5769292"/>
-            <a:chExt cx="11125200" cy="518160"/>
+            <a:chExt cx="11125200" cy="593408"/>
           </a:xfrm>
         </p:grpSpPr>
         <p:sp>
@@ -5899,11 +5903,11 @@
           <p:spPr>
             <a:xfrm>
               <a:off x="533400" y="5769292"/>
-              <a:ext cx="11125200" cy="518160"/>
+              <a:ext cx="11125200" cy="593408"/>
             </a:xfrm>
             <a:prstGeom prst="roundRect">
               <a:avLst>
-                <a:gd name="adj" fmla="val 22059"/>
+                <a:gd name="adj" fmla="val 19262"/>
               </a:avLst>
             </a:prstGeom>
             <a:solidFill>
@@ -5922,9 +5926,9 @@
           </p:nvGrpSpPr>
           <p:grpSpPr>
             <a:xfrm>
-              <a:off x="738188" y="5929315"/>
+              <a:off x="738188" y="5966462"/>
               <a:ext cx="200023" cy="200023"/>
-              <a:chOff x="738188" y="5929315"/>
+              <a:chOff x="738188" y="5966462"/>
               <a:chExt cx="200023" cy="200023"/>
             </a:xfrm>
           </p:grpSpPr>
@@ -5936,7 +5940,7 @@
             </p:nvSpPr>
             <p:spPr>
               <a:xfrm>
-                <a:off x="738188" y="5929315"/>
+                <a:off x="738188" y="5966462"/>
                 <a:ext cx="200023" cy="200023"/>
               </a:xfrm>
               <a:custGeom>
@@ -6075,7 +6079,7 @@
             </p:nvSpPr>
             <p:spPr>
               <a:xfrm>
-                <a:off x="871538" y="5995988"/>
+                <a:off x="871538" y="6033135"/>
                 <a:ext cx="9525" cy="9525"/>
               </a:xfrm>
               <a:custGeom>
@@ -6112,7 +6116,7 @@
           </p:nvSpPr>
           <p:spPr>
             <a:xfrm>
-              <a:off x="1040511" y="5929789"/>
+              <a:off x="1040511" y="5966936"/>
               <a:ext cx="9400454" cy="278702"/>
             </a:xfrm>
             <a:prstGeom prst="rect">
@@ -7080,47 +7084,7 @@
           <p:spPr>
             <a:xfrm>
               <a:off x="525780" y="1992630"/>
-              <a:ext cx="1751131" cy="293370"/>
-            </a:xfrm>
-            <a:prstGeom prst="rect">
-              <a:avLst/>
-            </a:prstGeom>
-            <a:noFill/>
-            <a:ln>
-              <a:noFill/>
-            </a:ln>
-          </p:spPr>
-          <p:txBody>
-            <a:bodyPr wrap="none" lIns="0" tIns="0" rIns="0" bIns="0" anchor="t" anchorCtr="0">
-              <a:spAutoFit/>
-            </a:bodyPr>
-            <a:lstStyle/>
-            <a:p>
-              <a:pPr algn="l"/>
-              <a:r>
-                <a:rPr lang="zh-CN" sz="1500" b="1" dirty="0">
-                  <a:solidFill>
-                    <a:srgbClr val="5B3FA0"/>
-                  </a:solidFill>
-                  <a:latin typeface="+mn-lt"/>
-                  <a:ea typeface="+mn-ea"/>
-                  <a:cs typeface="+mn-cs"/>
-                </a:rPr>
-                <a:t>创建型 Creational</a:t>
-              </a:r>
-            </a:p>
-          </p:txBody>
-        </p:sp>
-        <p:sp>
-          <p:nvSpPr>
-            <p:cNvPr id="10" name="TextBox 10"/>
-            <p:cNvSpPr txBox="1"/>
-            <p:nvPr/>
-          </p:nvSpPr>
-          <p:spPr>
-            <a:xfrm>
-              <a:off x="2525077" y="1992630"/>
-              <a:ext cx="3358515" cy="575310"/>
+              <a:ext cx="1015365" cy="575310"/>
             </a:xfrm>
             <a:prstGeom prst="rect">
               <a:avLst/>
@@ -7142,81 +7106,19 @@
                 </a:lnSpc>
               </a:pPr>
               <a:r>
-                <a:rPr lang="zh-CN" sz="1500" dirty="0">
-                  <a:solidFill>
-                    <a:srgbClr val="1F2937"/>
-                  </a:solidFill>
-                  <a:latin typeface="+mn-lt"/>
-                  <a:ea typeface="+mn-ea"/>
-                  <a:cs typeface="+mn-cs"/>
-                </a:rPr>
-                <a:t>主要用于创建对象。把“用哪个类、怎么</a:t>
+                <a:rPr lang="zh-CN" sz="1500" b="1" dirty="0">
+                  <a:solidFill>
+                    <a:srgbClr val="5B3FA0"/>
+                  </a:solidFill>
+                  <a:latin typeface="+mn-lt"/>
+                  <a:ea typeface="+mn-ea"/>
+                  <a:cs typeface="+mn-cs"/>
+                </a:rPr>
+                <a:t>创建型</a:t>
               </a:r>
               <a:br/>
               <a:r>
-                <a:rPr lang="zh-CN" sz="1500" dirty="0">
-                  <a:solidFill>
-                    <a:srgbClr val="1F2937"/>
-                  </a:solidFill>
-                  <a:latin typeface="+mn-lt"/>
-                  <a:ea typeface="+mn-ea"/>
-                  <a:cs typeface="+mn-cs"/>
-                </a:rPr>
-                <a:t>造”这件事从使用者身上拿走</a:t>
-              </a:r>
-            </a:p>
-          </p:txBody>
-        </p:sp>
-        <p:sp>
-          <p:nvSpPr>
-            <p:cNvPr id="11" name="Rectangle 11"/>
-            <p:cNvSpPr/>
-            <p:nvPr/>
-          </p:nvSpPr>
-          <p:spPr>
-            <a:xfrm>
-              <a:off x="533400" y="2594610"/>
-              <a:ext cx="5626418" cy="9525"/>
-            </a:xfrm>
-            <a:prstGeom prst="rect">
-              <a:avLst/>
-            </a:prstGeom>
-            <a:solidFill>
-              <a:srgbClr val="D9DFEA"/>
-            </a:solidFill>
-            <a:ln>
-              <a:noFill/>
-            </a:ln>
-          </p:spPr>
-        </p:sp>
-        <p:sp>
-          <p:nvSpPr>
-            <p:cNvPr id="12" name="TextBox 12"/>
-            <p:cNvSpPr txBox="1"/>
-            <p:nvPr/>
-          </p:nvSpPr>
-          <p:spPr>
-            <a:xfrm>
-              <a:off x="525780" y="2714625"/>
-              <a:ext cx="1804438" cy="293370"/>
-            </a:xfrm>
-            <a:prstGeom prst="rect">
-              <a:avLst/>
-            </a:prstGeom>
-            <a:noFill/>
-            <a:ln>
-              <a:noFill/>
-            </a:ln>
-          </p:spPr>
-          <p:txBody>
-            <a:bodyPr wrap="none" lIns="0" tIns="0" rIns="0" bIns="0" anchor="t" anchorCtr="0">
-              <a:spAutoFit/>
-            </a:bodyPr>
-            <a:lstStyle/>
-            <a:p>
-              <a:pPr algn="l"/>
-              <a:r>
-                <a:rPr lang="zh-CN" sz="1500" b="1" dirty="0">
+                <a:rPr lang="en-US" sz="1500" b="1" dirty="0">
                   <a:solidFill>
                     <a:srgbClr val="5B3FA0"/>
                   </a:solidFill>
@@ -7224,21 +7126,21 @@
                   <a:ea typeface="+mn-ea"/>
                   <a:cs typeface="+mn-cs"/>
                 </a:rPr>
-                <a:t>结构型 Structural</a:t>
-              </a:r>
-            </a:p>
-          </p:txBody>
-        </p:sp>
-        <p:sp>
-          <p:nvSpPr>
-            <p:cNvPr id="13" name="TextBox 13"/>
-            <p:cNvSpPr txBox="1"/>
-            <p:nvPr/>
-          </p:nvSpPr>
-          <p:spPr>
-            <a:xfrm>
-              <a:off x="2525077" y="2714625"/>
-              <a:ext cx="3444240" cy="575310"/>
+                <a:t>Creational</a:t>
+              </a:r>
+            </a:p>
+          </p:txBody>
+        </p:sp>
+        <p:sp>
+          <p:nvSpPr>
+            <p:cNvPr id="10" name="TextBox 10"/>
+            <p:cNvSpPr txBox="1"/>
+            <p:nvPr/>
+          </p:nvSpPr>
+          <p:spPr>
+            <a:xfrm>
+              <a:off x="1764030" y="1992630"/>
+              <a:ext cx="4034790" cy="575310"/>
             </a:xfrm>
             <a:prstGeom prst="rect">
               <a:avLst/>
@@ -7268,7 +7170,7 @@
                   <a:ea typeface="+mn-ea"/>
                   <a:cs typeface="+mn-cs"/>
                 </a:rPr>
-                <a:t>主要用于处理类或对象的组合。关心多个</a:t>
+                <a:t>主要用于创建对象。把“用哪个类、怎么造”这件</a:t>
               </a:r>
               <a:br/>
               <a:r>
@@ -7280,20 +7182,20 @@
                   <a:ea typeface="+mn-ea"/>
                   <a:cs typeface="+mn-cs"/>
                 </a:rPr>
-                <a:t>类、多个对象怎么拼成更大的结构</a:t>
-              </a:r>
-            </a:p>
-          </p:txBody>
-        </p:sp>
-        <p:sp>
-          <p:nvSpPr>
-            <p:cNvPr id="14" name="Rectangle 14"/>
+                <a:t>事从使用者身上拿走</a:t>
+              </a:r>
+            </a:p>
+          </p:txBody>
+        </p:sp>
+        <p:sp>
+          <p:nvSpPr>
+            <p:cNvPr id="11" name="Rectangle 11"/>
             <p:cNvSpPr/>
             <p:nvPr/>
           </p:nvSpPr>
           <p:spPr>
             <a:xfrm>
-              <a:off x="533400" y="3316605"/>
+              <a:off x="533400" y="2594610"/>
               <a:ext cx="5626418" cy="9525"/>
             </a:xfrm>
             <a:prstGeom prst="rect">
@@ -7309,54 +7211,14 @@
         </p:sp>
         <p:sp>
           <p:nvSpPr>
-            <p:cNvPr id="15" name="TextBox 15"/>
-            <p:cNvSpPr txBox="1"/>
-            <p:nvPr/>
-          </p:nvSpPr>
-          <p:spPr>
-            <a:xfrm>
-              <a:off x="525780" y="3436620"/>
-              <a:ext cx="1751131" cy="293370"/>
-            </a:xfrm>
-            <a:prstGeom prst="rect">
-              <a:avLst/>
-            </a:prstGeom>
-            <a:noFill/>
-            <a:ln>
-              <a:noFill/>
-            </a:ln>
-          </p:spPr>
-          <p:txBody>
-            <a:bodyPr wrap="none" lIns="0" tIns="0" rIns="0" bIns="0" anchor="t" anchorCtr="0">
-              <a:spAutoFit/>
-            </a:bodyPr>
-            <a:lstStyle/>
-            <a:p>
-              <a:pPr algn="l"/>
-              <a:r>
-                <a:rPr lang="zh-CN" sz="1500" b="1" dirty="0">
-                  <a:solidFill>
-                    <a:srgbClr val="5B3FA0"/>
-                  </a:solidFill>
-                  <a:latin typeface="+mn-lt"/>
-                  <a:ea typeface="+mn-ea"/>
-                  <a:cs typeface="+mn-cs"/>
-                </a:rPr>
-                <a:t>行为型 Behavioral</a:t>
-              </a:r>
-            </a:p>
-          </p:txBody>
-        </p:sp>
-        <p:sp>
-          <p:nvSpPr>
-            <p:cNvPr id="16" name="TextBox 16"/>
-            <p:cNvSpPr txBox="1"/>
-            <p:nvPr/>
-          </p:nvSpPr>
-          <p:spPr>
-            <a:xfrm>
-              <a:off x="2525077" y="3436620"/>
-              <a:ext cx="3444240" cy="857250"/>
+            <p:cNvPr id="12" name="TextBox 12"/>
+            <p:cNvSpPr txBox="1"/>
+            <p:nvPr/>
+          </p:nvSpPr>
+          <p:spPr>
+            <a:xfrm>
+              <a:off x="525780" y="2714625"/>
+              <a:ext cx="1005364" cy="857250"/>
             </a:xfrm>
             <a:prstGeom prst="rect">
               <a:avLst/>
@@ -7378,6 +7240,74 @@
                 </a:lnSpc>
               </a:pPr>
               <a:r>
+                <a:rPr lang="zh-CN" sz="1500" b="1" dirty="0">
+                  <a:solidFill>
+                    <a:srgbClr val="5B3FA0"/>
+                  </a:solidFill>
+                  <a:latin typeface="+mn-lt"/>
+                  <a:ea typeface="+mn-ea"/>
+                  <a:cs typeface="+mn-cs"/>
+                </a:rPr>
+                <a:t>结构型</a:t>
+              </a:r>
+              <a:br/>
+              <a:r>
+                <a:rPr lang="en-US" sz="1500" b="1" dirty="0">
+                  <a:solidFill>
+                    <a:srgbClr val="5B3FA0"/>
+                  </a:solidFill>
+                  <a:latin typeface="+mn-lt"/>
+                  <a:ea typeface="+mn-ea"/>
+                  <a:cs typeface="+mn-cs"/>
+                </a:rPr>
+                <a:t>Structura</a:t>
+              </a:r>
+              <a:br/>
+              <a:r>
+                <a:rPr lang="en-US" sz="1500" b="1" dirty="0">
+                  <a:solidFill>
+                    <a:srgbClr val="5B3FA0"/>
+                  </a:solidFill>
+                  <a:latin typeface="+mn-lt"/>
+                  <a:ea typeface="+mn-ea"/>
+                  <a:cs typeface="+mn-cs"/>
+                </a:rPr>
+                <a:t>l</a:t>
+              </a:r>
+            </a:p>
+          </p:txBody>
+        </p:sp>
+        <p:sp>
+          <p:nvSpPr>
+            <p:cNvPr id="13" name="TextBox 13"/>
+            <p:cNvSpPr txBox="1"/>
+            <p:nvPr/>
+          </p:nvSpPr>
+          <p:spPr>
+            <a:xfrm>
+              <a:off x="1764030" y="2714625"/>
+              <a:ext cx="4015740" cy="575310"/>
+            </a:xfrm>
+            <a:prstGeom prst="rect">
+              <a:avLst/>
+            </a:prstGeom>
+            <a:noFill/>
+            <a:ln>
+              <a:noFill/>
+            </a:ln>
+          </p:spPr>
+          <p:txBody>
+            <a:bodyPr wrap="none" lIns="0" tIns="0" rIns="0" bIns="0" anchor="t" anchorCtr="0">
+              <a:spAutoFit/>
+            </a:bodyPr>
+            <a:lstStyle/>
+            <a:p>
+              <a:pPr algn="l">
+                <a:lnSpc>
+                  <a:spcPts val="2220"/>
+                </a:lnSpc>
+              </a:pPr>
+              <a:r>
                 <a:rPr lang="zh-CN" sz="1500" dirty="0">
                   <a:solidFill>
                     <a:srgbClr val="1F2937"/>
@@ -7386,7 +7316,7 @@
                   <a:ea typeface="+mn-ea"/>
                   <a:cs typeface="+mn-cs"/>
                 </a:rPr>
-                <a:t>主要用于描述类或对象怎样交互、怎样分</a:t>
+                <a:t>主要用于处理类或对象的组合。关心多个类、多</a:t>
               </a:r>
               <a:br/>
               <a:r>
@@ -7398,10 +7328,120 @@
                   <a:ea typeface="+mn-ea"/>
                   <a:cs typeface="+mn-cs"/>
                 </a:rPr>
-                <a:t>配职责。关心运行时谁调用谁、谁负责什</a:t>
+                <a:t>个对象怎么拼成更大的结构</a:t>
+              </a:r>
+            </a:p>
+          </p:txBody>
+        </p:sp>
+        <p:sp>
+          <p:nvSpPr>
+            <p:cNvPr id="14" name="Rectangle 14"/>
+            <p:cNvSpPr/>
+            <p:nvPr/>
+          </p:nvSpPr>
+          <p:spPr>
+            <a:xfrm>
+              <a:off x="533400" y="3598545"/>
+              <a:ext cx="5626418" cy="9525"/>
+            </a:xfrm>
+            <a:prstGeom prst="rect">
+              <a:avLst/>
+            </a:prstGeom>
+            <a:solidFill>
+              <a:srgbClr val="D9DFEA"/>
+            </a:solidFill>
+            <a:ln>
+              <a:noFill/>
+            </a:ln>
+          </p:spPr>
+        </p:sp>
+        <p:sp>
+          <p:nvSpPr>
+            <p:cNvPr id="15" name="TextBox 15"/>
+            <p:cNvSpPr txBox="1"/>
+            <p:nvPr/>
+          </p:nvSpPr>
+          <p:spPr>
+            <a:xfrm>
+              <a:off x="525780" y="3718560"/>
+              <a:ext cx="1015365" cy="575310"/>
+            </a:xfrm>
+            <a:prstGeom prst="rect">
+              <a:avLst/>
+            </a:prstGeom>
+            <a:noFill/>
+            <a:ln>
+              <a:noFill/>
+            </a:ln>
+          </p:spPr>
+          <p:txBody>
+            <a:bodyPr wrap="none" lIns="0" tIns="0" rIns="0" bIns="0" anchor="t" anchorCtr="0">
+              <a:spAutoFit/>
+            </a:bodyPr>
+            <a:lstStyle/>
+            <a:p>
+              <a:pPr algn="l">
+                <a:lnSpc>
+                  <a:spcPts val="2220"/>
+                </a:lnSpc>
+              </a:pPr>
+              <a:r>
+                <a:rPr lang="zh-CN" sz="1500" b="1" dirty="0">
+                  <a:solidFill>
+                    <a:srgbClr val="5B3FA0"/>
+                  </a:solidFill>
+                  <a:latin typeface="+mn-lt"/>
+                  <a:ea typeface="+mn-ea"/>
+                  <a:cs typeface="+mn-cs"/>
+                </a:rPr>
+                <a:t>行为型</a:t>
               </a:r>
               <a:br/>
               <a:r>
+                <a:rPr lang="en-US" sz="1500" b="1" dirty="0">
+                  <a:solidFill>
+                    <a:srgbClr val="5B3FA0"/>
+                  </a:solidFill>
+                  <a:latin typeface="+mn-lt"/>
+                  <a:ea typeface="+mn-ea"/>
+                  <a:cs typeface="+mn-cs"/>
+                </a:rPr>
+                <a:t>Behavioral</a:t>
+              </a:r>
+            </a:p>
+          </p:txBody>
+        </p:sp>
+        <p:sp>
+          <p:nvSpPr>
+            <p:cNvPr id="16" name="TextBox 16"/>
+            <p:cNvSpPr txBox="1"/>
+            <p:nvPr/>
+          </p:nvSpPr>
+          <p:spPr>
+            <a:xfrm>
+              <a:off x="1764030" y="3718560"/>
+              <a:ext cx="3825240" cy="575310"/>
+            </a:xfrm>
+            <a:prstGeom prst="rect">
+              <a:avLst/>
+            </a:prstGeom>
+            <a:noFill/>
+            <a:ln>
+              <a:noFill/>
+            </a:ln>
+          </p:spPr>
+          <p:txBody>
+            <a:bodyPr wrap="none" lIns="0" tIns="0" rIns="0" bIns="0" anchor="t" anchorCtr="0">
+              <a:spAutoFit/>
+            </a:bodyPr>
+            <a:lstStyle/>
+            <a:p>
+              <a:pPr algn="l">
+                <a:lnSpc>
+                  <a:spcPts val="2220"/>
+                </a:lnSpc>
+              </a:pPr>
+              <a:r>
                 <a:rPr lang="zh-CN" sz="1500" dirty="0">
                   <a:solidFill>
                     <a:srgbClr val="1F2937"/>
@@ -7410,7 +7450,19 @@
                   <a:ea typeface="+mn-ea"/>
                   <a:cs typeface="+mn-cs"/>
                 </a:rPr>
-                <a:t>么</a:t>
+                <a:t>主要用于描述类或对象怎样交互、怎样分配职</a:t>
+              </a:r>
+              <a:br/>
+              <a:r>
+                <a:rPr lang="zh-CN" sz="1500" dirty="0">
+                  <a:solidFill>
+                    <a:srgbClr val="1F2937"/>
+                  </a:solidFill>
+                  <a:latin typeface="+mn-lt"/>
+                  <a:ea typeface="+mn-ea"/>
+                  <a:cs typeface="+mn-cs"/>
+                </a:rPr>
+                <a:t>责。关心运行时谁调用谁、谁负责什么</a:t>
               </a:r>
             </a:p>
           </p:txBody>
@@ -10259,7 +10311,7 @@
           <p:spPr>
             <a:xfrm>
               <a:off x="7600950" y="4351020"/>
-              <a:ext cx="2705100" cy="186690"/>
+              <a:ext cx="2609850" cy="186690"/>
             </a:xfrm>
             <a:custGeom>
               <a:avLst/>
@@ -10268,7 +10320,7 @@
               <a:cxnLst/>
               <a:rect l="l" t="t" r="r" b="b"/>
               <a:pathLst>
-                <a:path w="2705100" h="186690">
+                <a:path w="2609850" h="186690">
                   <a:moveTo>
                     <a:pt x="0" y="186690"/>
                   </a:moveTo>
@@ -10276,10 +10328,10 @@
                     <a:pt x="0" y="30480"/>
                   </a:lnTo>
                   <a:lnTo>
-                    <a:pt x="2705100" y="30480"/>
+                    <a:pt x="2609850" y="30480"/>
                   </a:lnTo>
                   <a:lnTo>
-                    <a:pt x="2705100" y="0"/>
+                    <a:pt x="2609850" y="0"/>
                   </a:lnTo>
                 </a:path>
               </a:pathLst>
@@ -10303,7 +10355,7 @@
           </p:nvSpPr>
           <p:spPr>
             <a:xfrm>
-              <a:off x="10232708" y="4225290"/>
+              <a:off x="10137458" y="4225290"/>
               <a:ext cx="146685" cy="125730"/>
             </a:xfrm>
             <a:custGeom>
@@ -10346,7 +10398,7 @@
           <p:spPr>
             <a:xfrm>
               <a:off x="10306050" y="4351020"/>
-              <a:ext cx="9525" cy="186690"/>
+              <a:ext cx="95250" cy="186690"/>
             </a:xfrm>
             <a:custGeom>
               <a:avLst/>
@@ -10355,12 +10407,18 @@
               <a:cxnLst/>
               <a:rect l="l" t="t" r="r" b="b"/>
               <a:pathLst>
-                <a:path w="9525" h="186690">
+                <a:path w="95250" h="186690">
                   <a:moveTo>
                     <a:pt x="0" y="186690"/>
                   </a:moveTo>
                   <a:lnTo>
-                    <a:pt x="0" y="0"/>
+                    <a:pt x="0" y="30480"/>
+                  </a:lnTo>
+                  <a:lnTo>
+                    <a:pt x="95250" y="30480"/>
+                  </a:lnTo>
+                  <a:lnTo>
+                    <a:pt x="95250" y="0"/>
                   </a:lnTo>
                 </a:path>
               </a:pathLst>
@@ -10384,7 +10442,7 @@
           </p:nvSpPr>
           <p:spPr>
             <a:xfrm>
-              <a:off x="10232708" y="4225290"/>
+              <a:off x="10327958" y="4225290"/>
               <a:ext cx="146685" cy="125730"/>
             </a:xfrm>
             <a:custGeom>
@@ -18192,9 +18250,9 @@
         <p:grpSpPr>
           <a:xfrm>
             <a:off x="533400" y="5156835"/>
-            <a:ext cx="11125200" cy="488632"/>
+            <a:ext cx="11125200" cy="545782"/>
             <a:chOff x="533400" y="5156835"/>
-            <a:chExt cx="11125200" cy="488632"/>
+            <a:chExt cx="11125200" cy="545782"/>
           </a:xfrm>
         </p:grpSpPr>
         <p:sp>
@@ -18206,11 +18264,11 @@
           <p:spPr>
             <a:xfrm>
               <a:off x="533400" y="5156835"/>
-              <a:ext cx="11125200" cy="488632"/>
+              <a:ext cx="11125200" cy="545782"/>
             </a:xfrm>
             <a:prstGeom prst="roundRect">
               <a:avLst>
-                <a:gd name="adj" fmla="val 23392"/>
+                <a:gd name="adj" fmla="val 20942"/>
               </a:avLst>
             </a:prstGeom>
             <a:solidFill>
@@ -18229,9 +18287,9 @@
           </p:nvGrpSpPr>
           <p:grpSpPr>
             <a:xfrm>
-              <a:off x="738188" y="5301615"/>
+              <a:off x="738188" y="5330190"/>
               <a:ext cx="200026" cy="200025"/>
-              <a:chOff x="738188" y="5301615"/>
+              <a:chOff x="738188" y="5330190"/>
               <a:chExt cx="200026" cy="200025"/>
             </a:xfrm>
           </p:grpSpPr>
@@ -18243,7 +18301,7 @@
             </p:nvSpPr>
             <p:spPr>
               <a:xfrm>
-                <a:off x="738188" y="5301615"/>
+                <a:off x="738188" y="5330190"/>
                 <a:ext cx="200026" cy="100013"/>
               </a:xfrm>
               <a:custGeom>
@@ -18303,7 +18361,7 @@
             </p:nvSpPr>
             <p:spPr>
               <a:xfrm>
-                <a:off x="777926" y="5346065"/>
+                <a:off x="777926" y="5374640"/>
                 <a:ext cx="120548" cy="155575"/>
               </a:xfrm>
               <a:custGeom>
@@ -18376,7 +18434,7 @@
             </p:nvSpPr>
             <p:spPr>
               <a:xfrm>
-                <a:off x="812642" y="5457191"/>
+                <a:off x="812642" y="5485766"/>
                 <a:ext cx="51118" cy="9525"/>
               </a:xfrm>
               <a:custGeom>
@@ -18413,7 +18471,7 @@
           </p:nvSpPr>
           <p:spPr>
             <a:xfrm>
-              <a:off x="1040892" y="5307330"/>
+              <a:off x="1040892" y="5335905"/>
               <a:ext cx="8210055" cy="264033"/>
             </a:xfrm>
             <a:prstGeom prst="rect">
@@ -44963,16 +45021,16 @@
       </p:grpSp>
       <p:grpSp>
         <p:nvGrpSpPr>
-          <p:cNvPr id="22" name="c1-bullets-1"/>
+          <p:cNvPr id="28" name="c1-bullets-1"/>
           <p:cNvGrpSpPr/>
           <p:nvPr/>
         </p:nvGrpSpPr>
         <p:grpSpPr>
           <a:xfrm>
             <a:off x="533400" y="1534478"/>
-            <a:ext cx="5383149" cy="2024253"/>
+            <a:ext cx="5383149" cy="2898647"/>
             <a:chOff x="533400" y="1534478"/>
-            <a:chExt cx="5383149" cy="2024253"/>
+            <a:chExt cx="5383149" cy="2898647"/>
           </a:xfrm>
         </p:grpSpPr>
         <p:sp>
@@ -45517,35 +45575,255 @@
             </a:p>
           </p:txBody>
         </p:sp>
+        <p:sp>
+          <p:nvSpPr>
+            <p:cNvPr id="22" name="Ellipse 22"/>
+            <p:cNvSpPr/>
+            <p:nvPr/>
+          </p:nvSpPr>
+          <p:spPr>
+            <a:xfrm>
+              <a:off x="533400" y="3591877"/>
+              <a:ext cx="192405" cy="192405"/>
+            </a:xfrm>
+            <a:prstGeom prst="ellipse">
+              <a:avLst/>
+            </a:prstGeom>
+            <a:solidFill>
+              <a:srgbClr val="5B3FA0"/>
+            </a:solidFill>
+            <a:ln>
+              <a:noFill/>
+            </a:ln>
+          </p:spPr>
+        </p:sp>
+        <p:sp>
+          <p:nvSpPr>
+            <p:cNvPr id="23" name="TextBox 23"/>
+            <p:cNvSpPr txBox="1"/>
+            <p:nvPr/>
+          </p:nvSpPr>
+          <p:spPr>
+            <a:xfrm>
+              <a:off x="589078" y="3630263"/>
+              <a:ext cx="81049" cy="179070"/>
+            </a:xfrm>
+            <a:prstGeom prst="rect">
+              <a:avLst/>
+            </a:prstGeom>
+            <a:noFill/>
+            <a:ln>
+              <a:noFill/>
+            </a:ln>
+          </p:spPr>
+          <p:txBody>
+            <a:bodyPr wrap="none" lIns="0" tIns="0" rIns="0" bIns="0" anchor="t" anchorCtr="0">
+              <a:spAutoFit/>
+            </a:bodyPr>
+            <a:lstStyle/>
+            <a:p>
+              <a:pPr algn="ctr"/>
+              <a:r>
+                <a:rPr lang="zh-CN" sz="920" b="1" dirty="0">
+                  <a:solidFill>
+                    <a:srgbClr val="FFFFFF"/>
+                  </a:solidFill>
+                  <a:latin typeface="+mn-lt"/>
+                  <a:ea typeface="+mn-ea"/>
+                  <a:cs typeface="+mn-cs"/>
+                </a:rPr>
+                <a:t>6</a:t>
+              </a:r>
+            </a:p>
+          </p:txBody>
+        </p:sp>
+        <p:sp>
+          <p:nvSpPr>
+            <p:cNvPr id="24" name="TextBox 24"/>
+            <p:cNvSpPr txBox="1"/>
+            <p:nvPr/>
+          </p:nvSpPr>
+          <p:spPr>
+            <a:xfrm>
+              <a:off x="814197" y="3603308"/>
+              <a:ext cx="4985766" cy="521208"/>
+            </a:xfrm>
+            <a:prstGeom prst="rect">
+              <a:avLst/>
+            </a:prstGeom>
+            <a:noFill/>
+            <a:ln>
+              <a:noFill/>
+            </a:ln>
+          </p:spPr>
+          <p:txBody>
+            <a:bodyPr wrap="none" lIns="0" tIns="0" rIns="0" bIns="0" anchor="t" anchorCtr="0">
+              <a:spAutoFit/>
+            </a:bodyPr>
+            <a:lstStyle/>
+            <a:p>
+              <a:pPr algn="l">
+                <a:lnSpc>
+                  <a:spcPts val="2025"/>
+                </a:lnSpc>
+              </a:pPr>
+              <a:r>
+                <a:rPr lang="zh-CN" sz="1350" dirty="0">
+                  <a:solidFill>
+                    <a:srgbClr val="1F2937"/>
+                  </a:solidFill>
+                  <a:latin typeface="+mn-lt"/>
+                  <a:ea typeface="+mn-ea"/>
+                  <a:cs typeface="+mn-cs"/>
+                </a:rPr>
+                <a:t>按粒度分三层：惯用法、设计模式、架构模式；框架是可运行的半</a:t>
+              </a:r>
+              <a:br/>
+              <a:r>
+                <a:rPr lang="zh-CN" sz="1350" dirty="0">
+                  <a:solidFill>
+                    <a:srgbClr val="1F2937"/>
+                  </a:solidFill>
+                  <a:latin typeface="+mn-lt"/>
+                  <a:ea typeface="+mn-ea"/>
+                  <a:cs typeface="+mn-cs"/>
+                </a:rPr>
+                <a:t>成品，里面用到多个模式</a:t>
+              </a:r>
+            </a:p>
+          </p:txBody>
+        </p:sp>
+        <p:sp>
+          <p:nvSpPr>
+            <p:cNvPr id="25" name="Ellipse 25"/>
+            <p:cNvSpPr/>
+            <p:nvPr/>
+          </p:nvSpPr>
+          <p:spPr>
+            <a:xfrm>
+              <a:off x="533400" y="4157662"/>
+              <a:ext cx="192405" cy="192405"/>
+            </a:xfrm>
+            <a:prstGeom prst="ellipse">
+              <a:avLst/>
+            </a:prstGeom>
+            <a:solidFill>
+              <a:srgbClr val="5B3FA0"/>
+            </a:solidFill>
+            <a:ln>
+              <a:noFill/>
+            </a:ln>
+          </p:spPr>
+        </p:sp>
+        <p:sp>
+          <p:nvSpPr>
+            <p:cNvPr id="26" name="TextBox 26"/>
+            <p:cNvSpPr txBox="1"/>
+            <p:nvPr/>
+          </p:nvSpPr>
+          <p:spPr>
+            <a:xfrm>
+              <a:off x="589078" y="4196048"/>
+              <a:ext cx="81049" cy="179070"/>
+            </a:xfrm>
+            <a:prstGeom prst="rect">
+              <a:avLst/>
+            </a:prstGeom>
+            <a:noFill/>
+            <a:ln>
+              <a:noFill/>
+            </a:ln>
+          </p:spPr>
+          <p:txBody>
+            <a:bodyPr wrap="none" lIns="0" tIns="0" rIns="0" bIns="0" anchor="t" anchorCtr="0">
+              <a:spAutoFit/>
+            </a:bodyPr>
+            <a:lstStyle/>
+            <a:p>
+              <a:pPr algn="ctr"/>
+              <a:r>
+                <a:rPr lang="zh-CN" sz="920" b="1" dirty="0">
+                  <a:solidFill>
+                    <a:srgbClr val="FFFFFF"/>
+                  </a:solidFill>
+                  <a:latin typeface="+mn-lt"/>
+                  <a:ea typeface="+mn-ea"/>
+                  <a:cs typeface="+mn-cs"/>
+                </a:rPr>
+                <a:t>7</a:t>
+              </a:r>
+            </a:p>
+          </p:txBody>
+        </p:sp>
+        <p:sp>
+          <p:nvSpPr>
+            <p:cNvPr id="27" name="TextBox 27"/>
+            <p:cNvSpPr txBox="1"/>
+            <p:nvPr/>
+          </p:nvSpPr>
+          <p:spPr>
+            <a:xfrm>
+              <a:off x="814197" y="4169092"/>
+              <a:ext cx="4557141" cy="264033"/>
+            </a:xfrm>
+            <a:prstGeom prst="rect">
+              <a:avLst/>
+            </a:prstGeom>
+            <a:noFill/>
+            <a:ln>
+              <a:noFill/>
+            </a:ln>
+          </p:spPr>
+          <p:txBody>
+            <a:bodyPr wrap="none" lIns="0" tIns="0" rIns="0" bIns="0" anchor="t" anchorCtr="0">
+              <a:spAutoFit/>
+            </a:bodyPr>
+            <a:lstStyle/>
+            <a:p>
+              <a:pPr algn="l"/>
+              <a:r>
+                <a:rPr lang="zh-CN" sz="1350" dirty="0">
+                  <a:solidFill>
+                    <a:srgbClr val="1F2937"/>
+                  </a:solidFill>
+                  <a:latin typeface="+mn-lt"/>
+                  <a:ea typeface="+mn-ea"/>
+                  <a:cs typeface="+mn-cs"/>
+                </a:rPr>
+                <a:t>按创建、结构、行为的顺序学，每个模式都问同一组问题</a:t>
+              </a:r>
+            </a:p>
+          </p:txBody>
+        </p:sp>
       </p:grpSp>
       <p:grpSp>
         <p:nvGrpSpPr>
-          <p:cNvPr id="28" name="c1-callout-2"/>
+          <p:cNvPr id="34" name="c1-callout-2"/>
           <p:cNvGrpSpPr/>
           <p:nvPr/>
         </p:nvGrpSpPr>
         <p:grpSpPr>
           <a:xfrm>
-            <a:off x="533400" y="3675698"/>
-            <a:ext cx="5626418" cy="729615"/>
-            <a:chOff x="533400" y="3675698"/>
-            <a:chExt cx="5626418" cy="729615"/>
+            <a:off x="533400" y="4550092"/>
+            <a:ext cx="5626418" cy="1146810"/>
+            <a:chOff x="533400" y="4550092"/>
+            <a:chExt cx="5626418" cy="1146810"/>
           </a:xfrm>
         </p:grpSpPr>
         <p:sp>
           <p:nvSpPr>
-            <p:cNvPr id="23" name="Rectangle 23"/>
+            <p:cNvPr id="29" name="Rectangle 29"/>
             <p:cNvSpPr/>
             <p:nvPr/>
           </p:nvSpPr>
           <p:spPr>
             <a:xfrm>
-              <a:off x="533400" y="3675698"/>
-              <a:ext cx="5626418" cy="729615"/>
+              <a:off x="533400" y="4550092"/>
+              <a:ext cx="5626418" cy="1146810"/>
             </a:xfrm>
             <a:prstGeom prst="roundRect">
               <a:avLst>
-                <a:gd name="adj" fmla="val 15666"/>
+                <a:gd name="adj" fmla="val 9967"/>
               </a:avLst>
             </a:prstGeom>
             <a:solidFill>
@@ -45558,27 +45836,27 @@
         </p:sp>
         <p:grpSp>
           <p:nvGrpSpPr>
-            <p:cNvPr id="26" name="Group 26"/>
+            <p:cNvPr id="32" name="Group 32"/>
             <p:cNvGrpSpPr/>
             <p:nvPr/>
           </p:nvGrpSpPr>
           <p:grpSpPr>
             <a:xfrm>
-              <a:off x="738188" y="3940495"/>
+              <a:off x="738188" y="5023487"/>
               <a:ext cx="200023" cy="200023"/>
-              <a:chOff x="738188" y="3940495"/>
+              <a:chOff x="738188" y="5023487"/>
               <a:chExt cx="200023" cy="200023"/>
             </a:xfrm>
           </p:grpSpPr>
           <p:sp>
             <p:nvSpPr>
-              <p:cNvPr id="24" name="Freeform 24"/>
+              <p:cNvPr id="30" name="Freeform 30"/>
               <p:cNvSpPr/>
               <p:nvPr/>
             </p:nvSpPr>
             <p:spPr>
               <a:xfrm>
-                <a:off x="738188" y="3940495"/>
+                <a:off x="738188" y="5023487"/>
                 <a:ext cx="200023" cy="200023"/>
               </a:xfrm>
               <a:custGeom>
@@ -45711,13 +45989,13 @@
           </p:sp>
           <p:sp>
             <p:nvSpPr>
-              <p:cNvPr id="25" name="Freeform 25"/>
+              <p:cNvPr id="31" name="Freeform 31"/>
               <p:cNvSpPr/>
               <p:nvPr/>
             </p:nvSpPr>
             <p:spPr>
               <a:xfrm>
-                <a:off x="871538" y="4007168"/>
+                <a:off x="871538" y="5090160"/>
                 <a:ext cx="9525" cy="9525"/>
               </a:xfrm>
               <a:custGeom>
@@ -45748,13 +46026,13 @@
         </p:grpSp>
         <p:sp>
           <p:nvSpPr>
-            <p:cNvPr id="27" name="TextBox 27"/>
-            <p:cNvSpPr txBox="1"/>
-            <p:nvPr/>
-          </p:nvSpPr>
-          <p:spPr>
-            <a:xfrm>
-              <a:off x="1040892" y="3822382"/>
+            <p:cNvPr id="33" name="TextBox 33"/>
+            <p:cNvSpPr txBox="1"/>
+            <p:nvPr/>
+          </p:nvSpPr>
+          <p:spPr>
+            <a:xfrm>
+              <a:off x="1040892" y="4905375"/>
               <a:ext cx="4642866" cy="512636"/>
             </a:xfrm>
             <a:prstGeom prst="rect">
@@ -45805,7 +46083,7 @@
       </p:grpSp>
       <p:grpSp>
         <p:nvGrpSpPr>
-          <p:cNvPr id="55" name="c2-table-1"/>
+          <p:cNvPr id="61" name="c2-table-1"/>
           <p:cNvGrpSpPr/>
           <p:nvPr/>
         </p:nvGrpSpPr>
@@ -45819,7 +46097,7 @@
         </p:grpSpPr>
         <p:sp>
           <p:nvSpPr>
-            <p:cNvPr id="29" name="Rectangle 29"/>
+            <p:cNvPr id="35" name="Rectangle 35"/>
             <p:cNvSpPr/>
             <p:nvPr/>
           </p:nvSpPr>
@@ -45841,7 +46119,7 @@
         </p:sp>
         <p:sp>
           <p:nvSpPr>
-            <p:cNvPr id="30" name="TextBox 30"/>
+            <p:cNvPr id="36" name="TextBox 36"/>
             <p:cNvSpPr txBox="1"/>
             <p:nvPr/>
           </p:nvSpPr>
@@ -45881,7 +46159,7 @@
         </p:sp>
         <p:sp>
           <p:nvSpPr>
-            <p:cNvPr id="31" name="TextBox 31"/>
+            <p:cNvPr id="37" name="TextBox 37"/>
             <p:cNvSpPr txBox="1"/>
             <p:nvPr/>
           </p:nvSpPr>
@@ -45921,7 +46199,7 @@
         </p:sp>
         <p:sp>
           <p:nvSpPr>
-            <p:cNvPr id="32" name="TextBox 32"/>
+            <p:cNvPr id="38" name="TextBox 38"/>
             <p:cNvSpPr txBox="1"/>
             <p:nvPr/>
           </p:nvSpPr>
@@ -45961,7 +46239,7 @@
         </p:sp>
         <p:sp>
           <p:nvSpPr>
-            <p:cNvPr id="33" name="TextBox 33"/>
+            <p:cNvPr id="39" name="TextBox 39"/>
             <p:cNvSpPr txBox="1"/>
             <p:nvPr/>
           </p:nvSpPr>
@@ -46001,7 +46279,7 @@
         </p:sp>
         <p:sp>
           <p:nvSpPr>
-            <p:cNvPr id="34" name="Rectangle 34"/>
+            <p:cNvPr id="40" name="Rectangle 40"/>
             <p:cNvSpPr/>
             <p:nvPr/>
           </p:nvSpPr>
@@ -46023,7 +46301,7 @@
         </p:sp>
         <p:sp>
           <p:nvSpPr>
-            <p:cNvPr id="35" name="Rectangle 35"/>
+            <p:cNvPr id="41" name="Rectangle 41"/>
             <p:cNvSpPr/>
             <p:nvPr/>
           </p:nvSpPr>
@@ -46045,7 +46323,7 @@
         </p:sp>
         <p:sp>
           <p:nvSpPr>
-            <p:cNvPr id="36" name="TextBox 36"/>
+            <p:cNvPr id="42" name="TextBox 42"/>
             <p:cNvSpPr txBox="1"/>
             <p:nvPr/>
           </p:nvSpPr>
@@ -46085,7 +46363,7 @@
         </p:sp>
         <p:sp>
           <p:nvSpPr>
-            <p:cNvPr id="37" name="Rectangle 37"/>
+            <p:cNvPr id="43" name="Rectangle 43"/>
             <p:cNvSpPr/>
             <p:nvPr/>
           </p:nvSpPr>
@@ -46107,7 +46385,7 @@
         </p:sp>
         <p:sp>
           <p:nvSpPr>
-            <p:cNvPr id="38" name="TextBox 38"/>
+            <p:cNvPr id="44" name="TextBox 44"/>
             <p:cNvSpPr txBox="1"/>
             <p:nvPr/>
           </p:nvSpPr>
@@ -46147,7 +46425,7 @@
         </p:sp>
         <p:sp>
           <p:nvSpPr>
-            <p:cNvPr id="39" name="Rectangle 39"/>
+            <p:cNvPr id="45" name="Rectangle 45"/>
             <p:cNvSpPr/>
             <p:nvPr/>
           </p:nvSpPr>
@@ -46169,7 +46447,7 @@
         </p:sp>
         <p:sp>
           <p:nvSpPr>
-            <p:cNvPr id="40" name="TextBox 40"/>
+            <p:cNvPr id="46" name="TextBox 46"/>
             <p:cNvSpPr txBox="1"/>
             <p:nvPr/>
           </p:nvSpPr>
@@ -46209,7 +46487,7 @@
         </p:sp>
         <p:sp>
           <p:nvSpPr>
-            <p:cNvPr id="41" name="TextBox 41"/>
+            <p:cNvPr id="47" name="TextBox 47"/>
             <p:cNvSpPr txBox="1"/>
             <p:nvPr/>
           </p:nvSpPr>
@@ -46249,7 +46527,7 @@
         </p:sp>
         <p:sp>
           <p:nvSpPr>
-            <p:cNvPr id="42" name="Rectangle 42"/>
+            <p:cNvPr id="48" name="Rectangle 48"/>
             <p:cNvSpPr/>
             <p:nvPr/>
           </p:nvSpPr>
@@ -46271,7 +46549,7 @@
         </p:sp>
         <p:sp>
           <p:nvSpPr>
-            <p:cNvPr id="43" name="Rectangle 43"/>
+            <p:cNvPr id="49" name="Rectangle 49"/>
             <p:cNvSpPr/>
             <p:nvPr/>
           </p:nvSpPr>
@@ -46293,7 +46571,7 @@
         </p:sp>
         <p:sp>
           <p:nvSpPr>
-            <p:cNvPr id="44" name="TextBox 44"/>
+            <p:cNvPr id="50" name="TextBox 50"/>
             <p:cNvSpPr txBox="1"/>
             <p:nvPr/>
           </p:nvSpPr>
@@ -46333,7 +46611,7 @@
         </p:sp>
         <p:sp>
           <p:nvSpPr>
-            <p:cNvPr id="45" name="TextBox 45"/>
+            <p:cNvPr id="51" name="TextBox 51"/>
             <p:cNvSpPr txBox="1"/>
             <p:nvPr/>
           </p:nvSpPr>
@@ -46373,7 +46651,7 @@
         </p:sp>
         <p:sp>
           <p:nvSpPr>
-            <p:cNvPr id="46" name="Rectangle 46"/>
+            <p:cNvPr id="52" name="Rectangle 52"/>
             <p:cNvSpPr/>
             <p:nvPr/>
           </p:nvSpPr>
@@ -46395,7 +46673,7 @@
         </p:sp>
         <p:sp>
           <p:nvSpPr>
-            <p:cNvPr id="47" name="TextBox 47"/>
+            <p:cNvPr id="53" name="TextBox 53"/>
             <p:cNvSpPr txBox="1"/>
             <p:nvPr/>
           </p:nvSpPr>
@@ -46435,7 +46713,7 @@
         </p:sp>
         <p:sp>
           <p:nvSpPr>
-            <p:cNvPr id="48" name="TextBox 48"/>
+            <p:cNvPr id="54" name="TextBox 54"/>
             <p:cNvSpPr txBox="1"/>
             <p:nvPr/>
           </p:nvSpPr>
@@ -46475,7 +46753,7 @@
         </p:sp>
         <p:sp>
           <p:nvSpPr>
-            <p:cNvPr id="49" name="Rectangle 49"/>
+            <p:cNvPr id="55" name="Rectangle 55"/>
             <p:cNvSpPr/>
             <p:nvPr/>
           </p:nvSpPr>
@@ -46497,7 +46775,7 @@
         </p:sp>
         <p:sp>
           <p:nvSpPr>
-            <p:cNvPr id="50" name="Rectangle 50"/>
+            <p:cNvPr id="56" name="Rectangle 56"/>
             <p:cNvSpPr/>
             <p:nvPr/>
           </p:nvSpPr>
@@ -46519,7 +46797,7 @@
         </p:sp>
         <p:sp>
           <p:nvSpPr>
-            <p:cNvPr id="51" name="TextBox 51"/>
+            <p:cNvPr id="57" name="TextBox 57"/>
             <p:cNvSpPr txBox="1"/>
             <p:nvPr/>
           </p:nvSpPr>
@@ -46559,7 +46837,7 @@
         </p:sp>
         <p:sp>
           <p:nvSpPr>
-            <p:cNvPr id="52" name="TextBox 52"/>
+            <p:cNvPr id="58" name="TextBox 58"/>
             <p:cNvSpPr txBox="1"/>
             <p:nvPr/>
           </p:nvSpPr>
@@ -46599,7 +46877,7 @@
         </p:sp>
         <p:sp>
           <p:nvSpPr>
-            <p:cNvPr id="53" name="Rectangle 53"/>
+            <p:cNvPr id="59" name="Rectangle 59"/>
             <p:cNvSpPr/>
             <p:nvPr/>
           </p:nvSpPr>
@@ -46621,7 +46899,7 @@
         </p:sp>
         <p:sp>
           <p:nvSpPr>
-            <p:cNvPr id="54" name="Rectangle 54"/>
+            <p:cNvPr id="60" name="Rectangle 60"/>
             <p:cNvSpPr/>
             <p:nvPr/>
           </p:nvSpPr>
@@ -46644,7 +46922,7 @@
       </p:grpSp>
       <p:grpSp>
         <p:nvGrpSpPr>
-          <p:cNvPr id="62" name="c2-card-2"/>
+          <p:cNvPr id="68" name="c2-card-2"/>
           <p:cNvGrpSpPr/>
           <p:nvPr/>
         </p:nvGrpSpPr>
@@ -46658,7 +46936,7 @@
         </p:grpSpPr>
         <p:sp>
           <p:nvSpPr>
-            <p:cNvPr id="56" name="Rectangle 56"/>
+            <p:cNvPr id="62" name="Rectangle 62"/>
             <p:cNvSpPr/>
             <p:nvPr/>
           </p:nvSpPr>
@@ -46684,7 +46962,7 @@
         </p:sp>
         <p:sp>
           <p:nvSpPr>
-            <p:cNvPr id="57" name="Rectangle 57"/>
+            <p:cNvPr id="63" name="Rectangle 63"/>
             <p:cNvSpPr/>
             <p:nvPr/>
           </p:nvSpPr>
@@ -46708,7 +46986,7 @@
         </p:sp>
         <p:sp>
           <p:nvSpPr>
-            <p:cNvPr id="58" name="Rectangle 58"/>
+            <p:cNvPr id="64" name="Rectangle 64"/>
             <p:cNvSpPr/>
             <p:nvPr/>
           </p:nvSpPr>
@@ -46732,7 +47010,7 @@
         </p:sp>
         <p:sp>
           <p:nvSpPr>
-            <p:cNvPr id="59" name="TextBox 59"/>
+            <p:cNvPr id="65" name="TextBox 65"/>
             <p:cNvSpPr txBox="1"/>
             <p:nvPr/>
           </p:nvSpPr>
@@ -46772,7 +47050,7 @@
         </p:sp>
         <p:sp>
           <p:nvSpPr>
-            <p:cNvPr id="60" name="TextBox 60"/>
+            <p:cNvPr id="66" name="TextBox 66"/>
             <p:cNvSpPr txBox="1"/>
             <p:nvPr/>
           </p:nvSpPr>
@@ -46812,7 +47090,7 @@
         </p:sp>
         <p:sp>
           <p:nvSpPr>
-            <p:cNvPr id="61" name="TextBox 61"/>
+            <p:cNvPr id="67" name="TextBox 67"/>
             <p:cNvSpPr txBox="1"/>
             <p:nvPr/>
           </p:nvSpPr>
@@ -46869,7 +47147,7 @@
       </p:grpSp>
       <p:grpSp>
         <p:nvGrpSpPr>
-          <p:cNvPr id="69" name="takeaway"/>
+          <p:cNvPr id="75" name="takeaway"/>
           <p:cNvGrpSpPr/>
           <p:nvPr/>
         </p:nvGrpSpPr>
@@ -46883,7 +47161,7 @@
         </p:grpSpPr>
         <p:sp>
           <p:nvSpPr>
-            <p:cNvPr id="63" name="Rectangle 63"/>
+            <p:cNvPr id="69" name="Rectangle 69"/>
             <p:cNvSpPr/>
             <p:nvPr/>
           </p:nvSpPr>
@@ -46907,7 +47185,7 @@
         </p:sp>
         <p:grpSp>
           <p:nvGrpSpPr>
-            <p:cNvPr id="67" name="Group 67"/>
+            <p:cNvPr id="73" name="Group 73"/>
             <p:cNvGrpSpPr/>
             <p:nvPr/>
           </p:nvGrpSpPr>
@@ -46921,7 +47199,7 @@
           </p:grpSpPr>
           <p:sp>
             <p:nvSpPr>
-              <p:cNvPr id="64" name="Freeform 64"/>
+              <p:cNvPr id="70" name="Freeform 70"/>
               <p:cNvSpPr/>
               <p:nvPr/>
             </p:nvSpPr>
@@ -46974,7 +47252,7 @@
           </p:sp>
           <p:sp>
             <p:nvSpPr>
-              <p:cNvPr id="65" name="Freeform 65"/>
+              <p:cNvPr id="71" name="Freeform 71"/>
               <p:cNvSpPr/>
               <p:nvPr/>
             </p:nvSpPr>
@@ -47010,7 +47288,7 @@
           </p:sp>
           <p:sp>
             <p:nvSpPr>
-              <p:cNvPr id="66" name="Freeform 66"/>
+              <p:cNvPr id="72" name="Freeform 72"/>
               <p:cNvSpPr/>
               <p:nvPr/>
             </p:nvSpPr>
@@ -47053,7 +47331,7 @@
         </p:grpSp>
         <p:sp>
           <p:nvSpPr>
-            <p:cNvPr id="68" name="TextBox 68"/>
+            <p:cNvPr id="74" name="TextBox 74"/>
             <p:cNvSpPr txBox="1"/>
             <p:nvPr/>
           </p:nvSpPr>
@@ -47094,7 +47372,7 @@
       </p:grpSp>
       <p:grpSp>
         <p:nvGrpSpPr>
-          <p:cNvPr id="72" name="footer"/>
+          <p:cNvPr id="78" name="footer"/>
           <p:cNvGrpSpPr/>
           <p:nvPr/>
         </p:nvGrpSpPr>
@@ -47108,7 +47386,7 @@
         </p:grpSpPr>
         <p:sp>
           <p:nvSpPr>
-            <p:cNvPr id="70" name="TextBox 70"/>
+            <p:cNvPr id="76" name="TextBox 76"/>
             <p:cNvSpPr txBox="1"/>
             <p:nvPr/>
           </p:nvSpPr>
@@ -47148,7 +47426,7 @@
         </p:sp>
         <p:sp>
           <p:nvSpPr>
-            <p:cNvPr id="71" name="TextBox 71"/>
+            <p:cNvPr id="77" name="TextBox 77"/>
             <p:cNvSpPr txBox="1"/>
             <p:nvPr/>
           </p:nvSpPr>
@@ -47382,10 +47660,10 @@
         </p:nvGrpSpPr>
         <p:grpSpPr>
           <a:xfrm>
-            <a:off x="525780" y="1548765"/>
-            <a:ext cx="6840474" cy="293370"/>
-            <a:chOff x="525780" y="1548765"/>
-            <a:chExt cx="6840474" cy="293370"/>
+            <a:off x="526542" y="1545907"/>
+            <a:ext cx="6156427" cy="264033"/>
+            <a:chOff x="526542" y="1545907"/>
+            <a:chExt cx="6156427" cy="264033"/>
           </a:xfrm>
         </p:grpSpPr>
         <p:sp>
@@ -47396,8 +47674,8 @@
           </p:nvSpPr>
           <p:spPr>
             <a:xfrm>
-              <a:off x="525780" y="1548765"/>
-              <a:ext cx="6840474" cy="293370"/>
+              <a:off x="526542" y="1545907"/>
+              <a:ext cx="6156427" cy="264033"/>
             </a:xfrm>
             <a:prstGeom prst="rect">
               <a:avLst/>
@@ -47415,7 +47693,7 @@
             <a:p>
               <a:pPr algn="l"/>
               <a:r>
-                <a:rPr lang="zh-CN" sz="1500" dirty="0">
+                <a:rPr lang="zh-CN" sz="1350" dirty="0">
                   <a:solidFill>
                     <a:srgbClr val="5B6475"/>
                   </a:solidFill>
@@ -47437,10 +47715,10 @@
         </p:nvGrpSpPr>
         <p:grpSpPr>
           <a:xfrm>
-            <a:off x="533400" y="1954530"/>
-            <a:ext cx="5842635" cy="2165985"/>
-            <a:chOff x="533400" y="1954530"/>
-            <a:chExt cx="5842635" cy="2165985"/>
+            <a:off x="533400" y="1928812"/>
+            <a:ext cx="5842635" cy="2021205"/>
+            <a:chOff x="533400" y="1928812"/>
+            <a:chExt cx="5842635" cy="2021205"/>
           </a:xfrm>
         </p:grpSpPr>
         <p:sp>
@@ -47451,12 +47729,12 @@
           </p:nvSpPr>
           <p:spPr>
             <a:xfrm>
-              <a:off x="533400" y="1954530"/>
-              <a:ext cx="5842635" cy="2165985"/>
+              <a:off x="533400" y="1928812"/>
+              <a:ext cx="5842635" cy="2021205"/>
             </a:xfrm>
             <a:prstGeom prst="roundRect">
               <a:avLst>
-                <a:gd name="adj" fmla="val 6157"/>
+                <a:gd name="adj" fmla="val 6598"/>
               </a:avLst>
             </a:prstGeom>
             <a:solidFill>
@@ -47477,8 +47755,8 @@
           </p:nvSpPr>
           <p:spPr>
             <a:xfrm>
-              <a:off x="542925" y="2087880"/>
-              <a:ext cx="47625" cy="1899285"/>
+              <a:off x="542925" y="2062162"/>
+              <a:ext cx="47625" cy="1754505"/>
             </a:xfrm>
             <a:prstGeom prst="roundRect">
               <a:avLst>
@@ -47501,8 +47779,8 @@
           </p:nvSpPr>
           <p:spPr>
             <a:xfrm>
-              <a:off x="775335" y="2158365"/>
-              <a:ext cx="778192" cy="257175"/>
+              <a:off x="758190" y="2115502"/>
+              <a:ext cx="707708" cy="238125"/>
             </a:xfrm>
             <a:prstGeom prst="roundRect">
               <a:avLst>
@@ -47525,8 +47803,8 @@
           </p:nvSpPr>
           <p:spPr>
             <a:xfrm>
-              <a:off x="857644" y="2194084"/>
-              <a:ext cx="614528" cy="220028"/>
+              <a:off x="842759" y="2148364"/>
+              <a:ext cx="537616" cy="190690"/>
             </a:xfrm>
             <a:prstGeom prst="rect">
               <a:avLst/>
@@ -47544,7 +47822,7 @@
             <a:p>
               <a:pPr algn="ctr"/>
               <a:r>
-                <a:rPr lang="zh-CN" sz="1120" b="1" dirty="0">
+                <a:rPr lang="zh-CN" sz="980" b="1" dirty="0">
                   <a:solidFill>
                     <a:srgbClr val="5B3FA0"/>
                   </a:solidFill>
@@ -47565,8 +47843,8 @@
           </p:nvSpPr>
           <p:spPr>
             <a:xfrm>
-              <a:off x="1660588" y="2197894"/>
-              <a:ext cx="2171344" cy="278702"/>
+              <a:off x="1573340" y="2150745"/>
+              <a:ext cx="2064258" cy="264033"/>
             </a:xfrm>
             <a:prstGeom prst="rect">
               <a:avLst/>
@@ -47584,7 +47862,7 @@
             <a:p>
               <a:pPr algn="l"/>
               <a:r>
-                <a:rPr lang="zh-CN" sz="1420" b="1" dirty="0">
+                <a:rPr lang="zh-CN" sz="1350" b="1" dirty="0">
                   <a:solidFill>
                     <a:srgbClr val="1F2937"/>
                   </a:solidFill>
@@ -47605,8 +47883,8 @@
           </p:nvSpPr>
           <p:spPr>
             <a:xfrm>
-              <a:off x="768096" y="2550319"/>
-              <a:ext cx="5063998" cy="821626"/>
+              <a:off x="751332" y="2476500"/>
+              <a:ext cx="5157216" cy="778383"/>
             </a:xfrm>
             <a:prstGeom prst="rect">
               <a:avLst/>
@@ -47624,11 +47902,11 @@
             <a:p>
               <a:pPr algn="l">
                 <a:lnSpc>
-                  <a:spcPts val="2138"/>
+                  <a:spcPts val="2025"/>
                 </a:lnSpc>
               </a:pPr>
               <a:r>
-                <a:rPr lang="zh-CN" sz="1420" dirty="0">
+                <a:rPr lang="zh-CN" sz="1350" dirty="0">
                   <a:solidFill>
                     <a:srgbClr val="1F2937"/>
                   </a:solidFill>
@@ -47636,11 +47914,11 @@
                   <a:ea typeface="+mn-ea"/>
                   <a:cs typeface="+mn-cs"/>
                 </a:rPr>
-                <a:t>每个模式都描述了一个在我们的环境中不断出现的问题，然后描</a:t>
+                <a:t>每个模式都描述了一个在我们的环境中不断出现的问题，然后描述了</a:t>
               </a:r>
               <a:br/>
               <a:r>
-                <a:rPr lang="zh-CN" sz="1420" dirty="0">
+                <a:rPr lang="zh-CN" sz="1350" dirty="0">
                   <a:solidFill>
                     <a:srgbClr val="1F2937"/>
                   </a:solidFill>
@@ -47648,11 +47926,11 @@
                   <a:ea typeface="+mn-ea"/>
                   <a:cs typeface="+mn-cs"/>
                 </a:rPr>
-                <a:t>述了该问题的解决方案的核心。通过这种方式，我们可以无数次</a:t>
+                <a:t>该问题的解决方案的核心。通过这种方式，我们可以无数次地重用那</a:t>
               </a:r>
               <a:br/>
               <a:r>
-                <a:rPr lang="zh-CN" sz="1420" dirty="0">
+                <a:rPr lang="zh-CN" sz="1350" dirty="0">
                   <a:solidFill>
                     <a:srgbClr val="1F2937"/>
                   </a:solidFill>
@@ -47660,7 +47938,7 @@
                   <a:ea typeface="+mn-ea"/>
                   <a:cs typeface="+mn-cs"/>
                 </a:rPr>
-                <a:t>地重用那些已有的解决方案，无需再重复相同的工作。</a:t>
+                <a:t>些已有的解决方案，无需再重复相同的工作。</a:t>
               </a:r>
             </a:p>
           </p:txBody>
@@ -47673,8 +47951,8 @@
           </p:nvSpPr>
           <p:spPr>
             <a:xfrm>
-              <a:off x="769239" y="3408998"/>
-              <a:ext cx="3797808" cy="234696"/>
+              <a:off x="752475" y="3287554"/>
+              <a:ext cx="3544672" cy="220028"/>
             </a:xfrm>
             <a:prstGeom prst="rect">
               <a:avLst/>
@@ -47692,7 +47970,7 @@
             <a:p>
               <a:pPr algn="l"/>
               <a:r>
-                <a:rPr lang="en-US" sz="1200" dirty="0">
+                <a:rPr lang="en-US" sz="1120" dirty="0">
                   <a:solidFill>
                     <a:srgbClr val="5B6475"/>
                   </a:solidFill>
@@ -47713,8 +47991,8 @@
           </p:nvSpPr>
           <p:spPr>
             <a:xfrm>
-              <a:off x="768096" y="3694271"/>
-              <a:ext cx="4525863" cy="278702"/>
+              <a:off x="751332" y="3551872"/>
+              <a:ext cx="4302709" cy="264033"/>
             </a:xfrm>
             <a:prstGeom prst="rect">
               <a:avLst/>
@@ -47732,7 +48010,7 @@
             <a:p>
               <a:pPr algn="l"/>
               <a:r>
-                <a:rPr lang="zh-CN" sz="1420" dirty="0">
+                <a:rPr lang="zh-CN" sz="1350" dirty="0">
                   <a:solidFill>
                     <a:srgbClr val="1F2937"/>
                   </a:solidFill>
@@ -47743,7 +48021,7 @@
                 <a:t xml:space="preserve">一句话：模式是在 </a:t>
               </a:r>
               <a:r>
-                <a:rPr lang="zh-CN" sz="1420" b="1" dirty="0">
+                <a:rPr lang="zh-CN" sz="1350" b="1" dirty="0">
                   <a:solidFill>
                     <a:srgbClr val="C2410C"/>
                   </a:solidFill>
@@ -47754,7 +48032,7 @@
                 <a:t>特定环境</a:t>
               </a:r>
               <a:r>
-                <a:rPr lang="zh-CN" sz="1420" dirty="0">
+                <a:rPr lang="zh-CN" sz="1350" dirty="0">
                   <a:solidFill>
                     <a:srgbClr val="1F2937"/>
                   </a:solidFill>
@@ -47776,10 +48054,10 @@
         </p:nvGrpSpPr>
         <p:grpSpPr>
           <a:xfrm>
-            <a:off x="526161" y="4329589"/>
-            <a:ext cx="5849874" cy="1389316"/>
-            <a:chOff x="526161" y="4329589"/>
-            <a:chExt cx="5849874" cy="1389316"/>
+            <a:off x="526542" y="4142422"/>
+            <a:ext cx="5849493" cy="1555624"/>
+            <a:chOff x="526542" y="4142422"/>
+            <a:chExt cx="5849493" cy="1555624"/>
           </a:xfrm>
         </p:grpSpPr>
         <p:sp>
@@ -47790,8 +48068,8 @@
           </p:nvSpPr>
           <p:spPr>
             <a:xfrm>
-              <a:off x="526161" y="4329589"/>
-              <a:ext cx="793493" cy="278702"/>
+              <a:off x="526542" y="4142422"/>
+              <a:ext cx="754329" cy="264033"/>
             </a:xfrm>
             <a:prstGeom prst="rect">
               <a:avLst/>
@@ -47809,7 +48087,7 @@
             <a:p>
               <a:pPr algn="l"/>
               <a:r>
-                <a:rPr lang="en-US" sz="1420" b="1" dirty="0">
+                <a:rPr lang="en-US" sz="1350" b="1" dirty="0">
                   <a:solidFill>
                     <a:srgbClr val="5B3FA0"/>
                   </a:solidFill>
@@ -47830,8 +48108,8 @@
           </p:nvSpPr>
           <p:spPr>
             <a:xfrm>
-              <a:off x="2480691" y="4329589"/>
-              <a:ext cx="3646526" cy="278702"/>
+              <a:off x="2279142" y="4142422"/>
+              <a:ext cx="3466719" cy="264033"/>
             </a:xfrm>
             <a:prstGeom prst="rect">
               <a:avLst/>
@@ -47849,7 +48127,7 @@
             <a:p>
               <a:pPr algn="l"/>
               <a:r>
-                <a:rPr lang="zh-CN" sz="1420" dirty="0">
+                <a:rPr lang="zh-CN" sz="1350" dirty="0">
                   <a:solidFill>
                     <a:srgbClr val="1F2937"/>
                   </a:solidFill>
@@ -47870,7 +48148,7 @@
           </p:nvSpPr>
           <p:spPr>
             <a:xfrm>
-              <a:off x="533400" y="4634865"/>
+              <a:off x="533400" y="4428172"/>
               <a:ext cx="5842635" cy="9525"/>
             </a:xfrm>
             <a:prstGeom prst="rect">
@@ -47892,8 +48170,64 @@
           </p:nvSpPr>
           <p:spPr>
             <a:xfrm>
-              <a:off x="526161" y="4751546"/>
-              <a:ext cx="1764519" cy="278702"/>
+              <a:off x="526542" y="4534852"/>
+              <a:ext cx="887682" cy="517398"/>
+            </a:xfrm>
+            <a:prstGeom prst="rect">
+              <a:avLst/>
+            </a:prstGeom>
+            <a:noFill/>
+            <a:ln>
+              <a:noFill/>
+            </a:ln>
+          </p:spPr>
+          <p:txBody>
+            <a:bodyPr wrap="none" lIns="0" tIns="0" rIns="0" bIns="0" anchor="t" anchorCtr="0">
+              <a:spAutoFit/>
+            </a:bodyPr>
+            <a:lstStyle/>
+            <a:p>
+              <a:pPr algn="l">
+                <a:lnSpc>
+                  <a:spcPts val="1995"/>
+                </a:lnSpc>
+              </a:pPr>
+              <a:r>
+                <a:rPr lang="en-US" sz="1350" b="1" dirty="0">
+                  <a:solidFill>
+                    <a:srgbClr val="5B3FA0"/>
+                  </a:solidFill>
+                  <a:latin typeface="+mn-lt"/>
+                  <a:ea typeface="+mn-ea"/>
+                  <a:cs typeface="+mn-cs"/>
+                </a:rPr>
+                <a:t>Problem</a:t>
+              </a:r>
+              <a:br/>
+              <a:r>
+                <a:rPr lang="zh-CN" sz="1350" b="1" dirty="0">
+                  <a:solidFill>
+                    <a:srgbClr val="5B3FA0"/>
+                  </a:solidFill>
+                  <a:latin typeface="+mn-lt"/>
+                  <a:ea typeface="+mn-ea"/>
+                  <a:cs typeface="+mn-cs"/>
+                </a:rPr>
+                <a:t>（Theme）</a:t>
+              </a:r>
+            </a:p>
+          </p:txBody>
+        </p:sp>
+        <p:sp>
+          <p:nvSpPr>
+            <p:cNvPr id="22" name="TextBox 22"/>
+            <p:cNvSpPr txBox="1"/>
+            <p:nvPr/>
+          </p:nvSpPr>
+          <p:spPr>
+            <a:xfrm>
+              <a:off x="2279142" y="4534852"/>
+              <a:ext cx="2921508" cy="264033"/>
             </a:xfrm>
             <a:prstGeom prst="rect">
               <a:avLst/>
@@ -47911,47 +48245,7 @@
             <a:p>
               <a:pPr algn="l"/>
               <a:r>
-                <a:rPr lang="zh-CN" sz="1420" b="1" dirty="0">
-                  <a:solidFill>
-                    <a:srgbClr val="5B3FA0"/>
-                  </a:solidFill>
-                  <a:latin typeface="+mn-lt"/>
-                  <a:ea typeface="+mn-ea"/>
-                  <a:cs typeface="+mn-cs"/>
-                </a:rPr>
-                <a:t>Problem（Theme）</a:t>
-              </a:r>
-            </a:p>
-          </p:txBody>
-        </p:sp>
-        <p:sp>
-          <p:nvSpPr>
-            <p:cNvPr id="22" name="TextBox 22"/>
-            <p:cNvSpPr txBox="1"/>
-            <p:nvPr/>
-          </p:nvSpPr>
-          <p:spPr>
-            <a:xfrm>
-              <a:off x="2480691" y="4751546"/>
-              <a:ext cx="3073044" cy="278702"/>
-            </a:xfrm>
-            <a:prstGeom prst="rect">
-              <a:avLst/>
-            </a:prstGeom>
-            <a:noFill/>
-            <a:ln>
-              <a:noFill/>
-            </a:ln>
-          </p:spPr>
-          <p:txBody>
-            <a:bodyPr wrap="none" lIns="0" tIns="0" rIns="0" bIns="0" anchor="t" anchorCtr="0">
-              <a:spAutoFit/>
-            </a:bodyPr>
-            <a:lstStyle/>
-            <a:p>
-              <a:pPr algn="l"/>
-              <a:r>
-                <a:rPr lang="zh-CN" sz="1420" dirty="0">
+                <a:rPr lang="zh-CN" sz="1350" dirty="0">
                   <a:solidFill>
                     <a:srgbClr val="1F2937"/>
                   </a:solidFill>
@@ -47972,7 +48266,7 @@
           </p:nvSpPr>
           <p:spPr>
             <a:xfrm>
-              <a:off x="533400" y="5056822"/>
+              <a:off x="533400" y="5074920"/>
               <a:ext cx="5842635" cy="9525"/>
             </a:xfrm>
             <a:prstGeom prst="rect">
@@ -47994,8 +48288,8 @@
           </p:nvSpPr>
           <p:spPr>
             <a:xfrm>
-              <a:off x="526161" y="5172551"/>
-              <a:ext cx="802819" cy="278702"/>
+              <a:off x="526542" y="5180648"/>
+              <a:ext cx="763195" cy="264033"/>
             </a:xfrm>
             <a:prstGeom prst="rect">
               <a:avLst/>
@@ -48013,7 +48307,7 @@
             <a:p>
               <a:pPr algn="l"/>
               <a:r>
-                <a:rPr lang="en-US" sz="1420" b="1" dirty="0">
+                <a:rPr lang="en-US" sz="1350" b="1" dirty="0">
                   <a:solidFill>
                     <a:srgbClr val="5B3FA0"/>
                   </a:solidFill>
@@ -48034,8 +48328,8 @@
           </p:nvSpPr>
           <p:spPr>
             <a:xfrm>
-              <a:off x="2480691" y="5172551"/>
-              <a:ext cx="3621278" cy="546354"/>
+              <a:off x="2279142" y="5180648"/>
+              <a:ext cx="3785616" cy="517398"/>
             </a:xfrm>
             <a:prstGeom prst="rect">
               <a:avLst/>
@@ -48053,11 +48347,11 @@
             <a:p>
               <a:pPr algn="l">
                 <a:lnSpc>
-                  <a:spcPts val="2108"/>
+                  <a:spcPts val="1995"/>
                 </a:lnSpc>
               </a:pPr>
               <a:r>
-                <a:rPr lang="zh-CN" sz="1420" dirty="0">
+                <a:rPr lang="zh-CN" sz="1350" dirty="0">
                   <a:solidFill>
                     <a:srgbClr val="1F2937"/>
                   </a:solidFill>
@@ -48065,11 +48359,11 @@
                   <a:ea typeface="+mn-ea"/>
                   <a:cs typeface="+mn-cs"/>
                 </a:rPr>
-                <a:t>求解该问题时各种物理关系的记述，也就是解</a:t>
+                <a:t>求解该问题时各种物理关系的记述，也就是解法本</a:t>
               </a:r>
               <a:br/>
               <a:r>
-                <a:rPr lang="zh-CN" sz="1420" dirty="0">
+                <a:rPr lang="zh-CN" sz="1350" dirty="0">
                   <a:solidFill>
                     <a:srgbClr val="1F2937"/>
                   </a:solidFill>
@@ -48077,7 +48371,7 @@
                   <a:ea typeface="+mn-ea"/>
                   <a:cs typeface="+mn-cs"/>
                 </a:rPr>
-                <a:t>法本身</a:t>
+                <a:t>身</a:t>
               </a:r>
             </a:p>
           </p:txBody>
@@ -48091,10 +48385,10 @@
         </p:nvGrpSpPr>
         <p:grpSpPr>
           <a:xfrm>
-            <a:off x="6680835" y="1954530"/>
-            <a:ext cx="4977765" cy="2156460"/>
-            <a:chOff x="6680835" y="1954530"/>
-            <a:chExt cx="4977765" cy="2156460"/>
+            <a:off x="6680835" y="1928812"/>
+            <a:ext cx="4977765" cy="2017395"/>
+            <a:chOff x="6680835" y="1928812"/>
+            <a:chExt cx="4977765" cy="2017395"/>
           </a:xfrm>
         </p:grpSpPr>
         <p:sp>
@@ -48105,12 +48399,12 @@
           </p:nvSpPr>
           <p:spPr>
             <a:xfrm>
-              <a:off x="6680835" y="1954530"/>
-              <a:ext cx="4977765" cy="2156460"/>
+              <a:off x="6680835" y="1928812"/>
+              <a:ext cx="4977765" cy="2017395"/>
             </a:xfrm>
             <a:prstGeom prst="roundRect">
               <a:avLst>
-                <a:gd name="adj" fmla="val 6184"/>
+                <a:gd name="adj" fmla="val 6610"/>
               </a:avLst>
             </a:prstGeom>
             <a:solidFill>
@@ -48131,8 +48425,8 @@
           </p:nvSpPr>
           <p:spPr>
             <a:xfrm>
-              <a:off x="6690360" y="2087880"/>
-              <a:ext cx="47625" cy="1889760"/>
+              <a:off x="6690360" y="2062162"/>
+              <a:ext cx="47625" cy="1750695"/>
             </a:xfrm>
             <a:prstGeom prst="roundRect">
               <a:avLst>
@@ -48155,8 +48449,8 @@
           </p:nvSpPr>
           <p:spPr>
             <a:xfrm>
-              <a:off x="6922770" y="2158365"/>
-              <a:ext cx="494348" cy="257175"/>
+              <a:off x="6905625" y="2115502"/>
+              <a:ext cx="458152" cy="238125"/>
             </a:xfrm>
             <a:prstGeom prst="roundRect">
               <a:avLst>
@@ -48179,8 +48473,8 @@
           </p:nvSpPr>
           <p:spPr>
             <a:xfrm>
-              <a:off x="7013931" y="2194084"/>
-              <a:ext cx="312979" cy="220028"/>
+              <a:off x="6998297" y="2148364"/>
+              <a:ext cx="273761" cy="190690"/>
             </a:xfrm>
             <a:prstGeom prst="rect">
               <a:avLst/>
@@ -48198,7 +48492,7 @@
             <a:p>
               <a:pPr algn="ctr"/>
               <a:r>
-                <a:rPr lang="zh-CN" sz="1120" b="1" dirty="0">
+                <a:rPr lang="zh-CN" sz="980" b="1" dirty="0">
                   <a:solidFill>
                     <a:srgbClr val="5B6475"/>
                   </a:solidFill>
@@ -48219,8 +48513,8 @@
           </p:nvSpPr>
           <p:spPr>
             <a:xfrm>
-              <a:off x="7524179" y="2197894"/>
-              <a:ext cx="1543761" cy="278702"/>
+              <a:off x="7472172" y="2150745"/>
+              <a:ext cx="1467612" cy="264033"/>
             </a:xfrm>
             <a:prstGeom prst="rect">
               <a:avLst/>
@@ -48238,7 +48532,7 @@
             <a:p>
               <a:pPr algn="l"/>
               <a:r>
-                <a:rPr lang="zh-CN" sz="1420" b="1" dirty="0">
+                <a:rPr lang="zh-CN" sz="1350" b="1" dirty="0">
                   <a:solidFill>
                     <a:srgbClr val="1F2937"/>
                   </a:solidFill>
@@ -48259,8 +48553,8 @@
           </p:nvSpPr>
           <p:spPr>
             <a:xfrm>
-              <a:off x="6915531" y="2550319"/>
-              <a:ext cx="4306570" cy="550164"/>
+              <a:off x="6898767" y="2476500"/>
+              <a:ext cx="4265676" cy="521208"/>
             </a:xfrm>
             <a:prstGeom prst="rect">
               <a:avLst/>
@@ -48278,11 +48572,11 @@
             <a:p>
               <a:pPr algn="l">
                 <a:lnSpc>
-                  <a:spcPts val="2138"/>
+                  <a:spcPts val="2025"/>
                 </a:lnSpc>
               </a:pPr>
               <a:r>
-                <a:rPr lang="zh-CN" sz="1420" dirty="0">
+                <a:rPr lang="zh-CN" sz="1350" dirty="0">
                   <a:solidFill>
                     <a:srgbClr val="1F2937"/>
                   </a:solidFill>
@@ -48290,11 +48584,11 @@
                   <a:ea typeface="+mn-ea"/>
                   <a:cs typeface="+mn-cs"/>
                 </a:rPr>
-                <a:t>Christopher Alexander，加州大学（伯克利）环境结</a:t>
+                <a:t>Christopher Alexander，加州大学（伯克利）环境结构</a:t>
               </a:r>
               <a:br/>
               <a:r>
-                <a:rPr lang="zh-CN" sz="1420" dirty="0">
+                <a:rPr lang="zh-CN" sz="1350" dirty="0">
                   <a:solidFill>
                     <a:srgbClr val="1F2937"/>
                   </a:solidFill>
@@ -48302,7 +48596,7 @@
                   <a:ea typeface="+mn-ea"/>
                   <a:cs typeface="+mn-cs"/>
                 </a:rPr>
-                <a:t>构中心研究所所长，被称为模式（Pattern）之父。</a:t>
+                <a:t>中心研究所所长，被称为模式（Pattern）之父。</a:t>
               </a:r>
             </a:p>
           </p:txBody>
@@ -48315,8 +48609,8 @@
           </p:nvSpPr>
           <p:spPr>
             <a:xfrm>
-              <a:off x="6915531" y="3141821"/>
-              <a:ext cx="4351204" cy="821626"/>
+              <a:off x="6898767" y="3033712"/>
+              <a:ext cx="4308110" cy="778383"/>
             </a:xfrm>
             <a:prstGeom prst="rect">
               <a:avLst/>
@@ -48334,11 +48628,11 @@
             <a:p>
               <a:pPr algn="l">
                 <a:lnSpc>
-                  <a:spcPts val="2138"/>
+                  <a:spcPts val="2025"/>
                 </a:lnSpc>
               </a:pPr>
               <a:r>
-                <a:rPr lang="zh-CN" sz="1420" dirty="0">
+                <a:rPr lang="zh-CN" sz="1350" dirty="0">
                   <a:solidFill>
                     <a:srgbClr val="1F2937"/>
                   </a:solidFill>
@@ -48350,7 +48644,7 @@
               </a:r>
               <a:br/>
               <a:r>
-                <a:rPr lang="zh-CN" sz="1420" dirty="0">
+                <a:rPr lang="zh-CN" sz="1350" dirty="0">
                   <a:solidFill>
                     <a:srgbClr val="1F2937"/>
                   </a:solidFill>
@@ -48361,7 +48655,7 @@
                 <a:t xml:space="preserve">Buildings, Construction》，书中给出 </a:t>
               </a:r>
               <a:r>
-                <a:rPr lang="zh-CN" sz="1420" b="1" dirty="0">
+                <a:rPr lang="zh-CN" sz="1350" b="1" dirty="0">
                   <a:solidFill>
                     <a:srgbClr val="1F2937"/>
                   </a:solidFill>
@@ -48372,7 +48666,7 @@
                 <a:t>253 个</a:t>
               </a:r>
               <a:r>
-                <a:rPr lang="zh-CN" sz="1420" dirty="0">
+                <a:rPr lang="zh-CN" sz="1350" dirty="0">
                   <a:solidFill>
                     <a:srgbClr val="1F2937"/>
                   </a:solidFill>
@@ -48380,11 +48674,11 @@
                   <a:ea typeface="+mn-ea"/>
                   <a:cs typeface="+mn-cs"/>
                 </a:rPr>
-                <a:t xml:space="preserve"> 建筑与</a:t>
+                <a:t xml:space="preserve"> 建筑与城</a:t>
               </a:r>
               <a:br/>
               <a:r>
-                <a:rPr lang="zh-CN" sz="1420" dirty="0">
+                <a:rPr lang="zh-CN" sz="1350" dirty="0">
                   <a:solidFill>
                     <a:srgbClr val="1F2937"/>
                   </a:solidFill>
@@ -48392,7 +48686,7 @@
                   <a:ea typeface="+mn-ea"/>
                   <a:cs typeface="+mn-cs"/>
                 </a:rPr>
-                <a:t>城市规划模式。</a:t>
+                <a:t>市规划模式。</a:t>
               </a:r>
             </a:p>
           </p:txBody>
@@ -48406,10 +48700,10 @@
         </p:nvGrpSpPr>
         <p:grpSpPr>
           <a:xfrm>
-            <a:off x="6680835" y="4320064"/>
-            <a:ext cx="4823826" cy="936879"/>
-            <a:chOff x="6680835" y="4320064"/>
-            <a:chExt cx="4823826" cy="936879"/>
+            <a:off x="6680835" y="4137660"/>
+            <a:ext cx="4590783" cy="881253"/>
+            <a:chOff x="6680835" y="4137660"/>
+            <a:chExt cx="4590783" cy="881253"/>
           </a:xfrm>
         </p:grpSpPr>
         <p:sp>
@@ -48420,8 +48714,8 @@
           </p:nvSpPr>
           <p:spPr>
             <a:xfrm>
-              <a:off x="6680835" y="4350068"/>
-              <a:ext cx="137160" cy="110490"/>
+              <a:off x="6680835" y="4166235"/>
+              <a:ext cx="129540" cy="104775"/>
             </a:xfrm>
             <a:custGeom>
               <a:avLst/>
@@ -48430,15 +48724,15 @@
               <a:cxnLst/>
               <a:rect l="l" t="t" r="r" b="b"/>
               <a:pathLst>
-                <a:path w="137160" h="110490">
+                <a:path w="129540" h="104775">
                   <a:moveTo>
-                    <a:pt x="0" y="58103"/>
+                    <a:pt x="0" y="55245"/>
                   </a:moveTo>
                   <a:lnTo>
-                    <a:pt x="52388" y="110490"/>
+                    <a:pt x="49530" y="104775"/>
                   </a:lnTo>
                   <a:lnTo>
-                    <a:pt x="137160" y="0"/>
+                    <a:pt x="129540" y="0"/>
                   </a:lnTo>
                 </a:path>
               </a:pathLst>
@@ -48460,8 +48754,8 @@
           </p:nvSpPr>
           <p:spPr>
             <a:xfrm>
-              <a:off x="6925056" y="4320064"/>
-              <a:ext cx="4411167" cy="278702"/>
+              <a:off x="6917817" y="4137660"/>
+              <a:ext cx="4193667" cy="264033"/>
             </a:xfrm>
             <a:prstGeom prst="rect">
               <a:avLst/>
@@ -48479,7 +48773,7 @@
             <a:p>
               <a:pPr algn="l"/>
               <a:r>
-                <a:rPr lang="zh-CN" sz="1420" dirty="0">
+                <a:rPr lang="zh-CN" sz="1350" dirty="0">
                   <a:solidFill>
                     <a:srgbClr val="1F2937"/>
                   </a:solidFill>
@@ -48500,8 +48794,8 @@
           </p:nvSpPr>
           <p:spPr>
             <a:xfrm>
-              <a:off x="6680835" y="4678680"/>
-              <a:ext cx="137160" cy="111442"/>
+              <a:off x="6680835" y="4474845"/>
+              <a:ext cx="129540" cy="104775"/>
             </a:xfrm>
             <a:custGeom>
               <a:avLst/>
@@ -48510,15 +48804,15 @@
               <a:cxnLst/>
               <a:rect l="l" t="t" r="r" b="b"/>
               <a:pathLst>
-                <a:path w="137160" h="111442">
+                <a:path w="129540" h="104775">
                   <a:moveTo>
-                    <a:pt x="0" y="59055"/>
+                    <a:pt x="0" y="55245"/>
                   </a:moveTo>
                   <a:lnTo>
-                    <a:pt x="52388" y="111442"/>
+                    <a:pt x="49530" y="104775"/>
                   </a:lnTo>
                   <a:lnTo>
-                    <a:pt x="137160" y="0"/>
+                    <a:pt x="129540" y="0"/>
                   </a:lnTo>
                 </a:path>
               </a:pathLst>
@@ -48540,8 +48834,8 @@
           </p:nvSpPr>
           <p:spPr>
             <a:xfrm>
-              <a:off x="6925056" y="4648676"/>
-              <a:ext cx="4220007" cy="278702"/>
+              <a:off x="6917817" y="4446270"/>
+              <a:ext cx="4011930" cy="264033"/>
             </a:xfrm>
             <a:prstGeom prst="rect">
               <a:avLst/>
@@ -48559,7 +48853,7 @@
             <a:p>
               <a:pPr algn="l"/>
               <a:r>
-                <a:rPr lang="zh-CN" sz="1420" dirty="0">
+                <a:rPr lang="zh-CN" sz="1350" dirty="0">
                   <a:solidFill>
                     <a:srgbClr val="1F2937"/>
                   </a:solidFill>
@@ -48580,8 +48874,8 @@
           </p:nvSpPr>
           <p:spPr>
             <a:xfrm>
-              <a:off x="6680835" y="5008245"/>
-              <a:ext cx="137160" cy="110490"/>
+              <a:off x="6680835" y="4783455"/>
+              <a:ext cx="129540" cy="104775"/>
             </a:xfrm>
             <a:custGeom>
               <a:avLst/>
@@ -48590,15 +48884,15 @@
               <a:cxnLst/>
               <a:rect l="l" t="t" r="r" b="b"/>
               <a:pathLst>
-                <a:path w="137160" h="110490">
+                <a:path w="129540" h="104775">
                   <a:moveTo>
-                    <a:pt x="0" y="59055"/>
+                    <a:pt x="0" y="55245"/>
                   </a:moveTo>
                   <a:lnTo>
-                    <a:pt x="52388" y="110490"/>
+                    <a:pt x="49530" y="104775"/>
                   </a:lnTo>
                   <a:lnTo>
-                    <a:pt x="137160" y="0"/>
+                    <a:pt x="129540" y="0"/>
                   </a:lnTo>
                 </a:path>
               </a:pathLst>
@@ -48620,8 +48914,8 @@
           </p:nvSpPr>
           <p:spPr>
             <a:xfrm>
-              <a:off x="6925056" y="4978241"/>
-              <a:ext cx="4579605" cy="278702"/>
+              <a:off x="6917817" y="4754880"/>
+              <a:ext cx="4353801" cy="264033"/>
             </a:xfrm>
             <a:prstGeom prst="rect">
               <a:avLst/>
@@ -48639,7 +48933,7 @@
             <a:p>
               <a:pPr algn="l"/>
               <a:r>
-                <a:rPr lang="zh-CN" sz="1420" dirty="0">
+                <a:rPr lang="zh-CN" sz="1350" dirty="0">
                   <a:solidFill>
                     <a:srgbClr val="1F2937"/>
                   </a:solidFill>
@@ -48661,10 +48955,10 @@
         </p:nvGrpSpPr>
         <p:grpSpPr>
           <a:xfrm>
-            <a:off x="533400" y="5844540"/>
-            <a:ext cx="11125200" cy="518160"/>
-            <a:chOff x="533400" y="5844540"/>
-            <a:chExt cx="11125200" cy="518160"/>
+            <a:off x="533400" y="5881688"/>
+            <a:ext cx="11125200" cy="481012"/>
+            <a:chOff x="533400" y="5881688"/>
+            <a:chExt cx="11125200" cy="481012"/>
           </a:xfrm>
         </p:grpSpPr>
         <p:sp>
@@ -48675,12 +48969,12 @@
           </p:nvSpPr>
           <p:spPr>
             <a:xfrm>
-              <a:off x="533400" y="5844540"/>
-              <a:ext cx="11125200" cy="518160"/>
+              <a:off x="533400" y="5881688"/>
+              <a:ext cx="11125200" cy="481012"/>
             </a:xfrm>
             <a:prstGeom prst="roundRect">
               <a:avLst>
-                <a:gd name="adj" fmla="val 22059"/>
+                <a:gd name="adj" fmla="val 23762"/>
               </a:avLst>
             </a:prstGeom>
             <a:solidFill>
@@ -48699,9 +48993,9 @@
           </p:nvGrpSpPr>
           <p:grpSpPr>
             <a:xfrm>
-              <a:off x="738188" y="6003610"/>
+              <a:off x="738188" y="6022660"/>
               <a:ext cx="200023" cy="200023"/>
-              <a:chOff x="738188" y="6003610"/>
+              <a:chOff x="738188" y="6022660"/>
               <a:chExt cx="200023" cy="200023"/>
             </a:xfrm>
           </p:grpSpPr>
@@ -48713,7 +49007,7 @@
             </p:nvSpPr>
             <p:spPr>
               <a:xfrm>
-                <a:off x="738188" y="6003610"/>
+                <a:off x="738188" y="6022660"/>
                 <a:ext cx="200023" cy="200023"/>
               </a:xfrm>
               <a:custGeom>
@@ -48852,7 +49146,7 @@
             </p:nvSpPr>
             <p:spPr>
               <a:xfrm>
-                <a:off x="871538" y="6070283"/>
+                <a:off x="871538" y="6089333"/>
                 <a:ext cx="9525" cy="9525"/>
               </a:xfrm>
               <a:custGeom>
@@ -48889,8 +49183,8 @@
           </p:nvSpPr>
           <p:spPr>
             <a:xfrm>
-              <a:off x="1040511" y="6004084"/>
-              <a:ext cx="7680010" cy="278702"/>
+              <a:off x="1040892" y="6028373"/>
+              <a:ext cx="7301370" cy="264033"/>
             </a:xfrm>
             <a:prstGeom prst="rect">
               <a:avLst/>
@@ -48908,7 +49202,7 @@
             <a:p>
               <a:pPr algn="l"/>
               <a:r>
-                <a:rPr lang="zh-CN" sz="1420" dirty="0">
+                <a:rPr lang="zh-CN" sz="1350" dirty="0">
                   <a:solidFill>
                     <a:srgbClr val="FFFFFF"/>
                   </a:solidFill>
